--- a/docs/AI架電エージェントのしくみ.pptx
+++ b/docs/AI架電エージェントのしくみ.pptx
@@ -21,9 +21,10 @@
     <p:sldId id="269" r:id="rId15"/>
     <p:sldId id="270" r:id="rId16"/>
     <p:sldId id="271" r:id="rId17"/>
+    <p:sldId id="272" r:id="rId18"/>
   </p:sldIdLst>
   <p:notesMasterIdLst>
-    <p:notesMasterId r:id="rId18"/>
+    <p:notesMasterId r:id="rId19"/>
   </p:notesMasterIdLst>
   <p:sldSz cx="9144000" cy="5143500"/>
   <p:notesSz cx="5143500" cy="9144000"/>
@@ -781,7 +782,7 @@
           <a:p>
             <a:r>
               <a:rPr lang="en-US" dirty="0"/>
-              <a:t>実際のデモ画面です。左側に会話がそのまま記録され、AIの発言の下には、なぜそう返したかという判断の理由が出ます。右側では、いま電話のどの段階にいるか、7つの質問のどれが聞けたかがリアルタイムで埋まっていきます。</a:t>
+              <a:t>実際のデモ画面です。左側に会話がそのまま記録され、AIの発言の下には、なぜそう返したかという判断の理由が出ます。右側では、いま電話のどの段階にいるか、7つの質問のどれが聞けたかがリアルタイムで埋まっていきます。右上のタブで、終わった通話の一覧（架電履歴）に切り替えられます。</a:t>
             </a:r>
             <a:endParaRPr lang="en-US" dirty="0"/>
           </a:p>
@@ -957,7 +958,7 @@
           <a:p>
             <a:r>
               <a:rPr lang="en-US" dirty="0"/>
-              <a:t>電話が終わると、左のチェックがすべて○になった状態で「アポ成立」と判定されます。右は聞き取った内容のメモの例です。商談を担当する方は、このメモを見てから商談に入れます。</a:t>
+              <a:t>電話が終わると、左のチェックがすべて○になった状態で「アポ成立」と判定されます。右は聞き取った内容のメモの例です。この内容は次のページの「架電履歴」に自動で保存され、商談を担当する方はそれを見てから商談に入れます。</a:t>
             </a:r>
             <a:endParaRPr lang="en-US" dirty="0"/>
           </a:p>
@@ -1045,7 +1046,7 @@
           <a:p>
             <a:r>
               <a:rPr lang="en-US" dirty="0"/>
-              <a:t>現在はパソコンの画面上で動くデモの段階です。マイクに話しかけて、AIとの会話を体験できます。次の段階では実際の電話回線とつなぎ、本物の電話で試していきます。</a:t>
+              <a:t>終わった通話は、画面右上の「架電履歴」タブで一覧できます。行を押すと、アポ成立チェックの結果、聞き取った内容、時刻付きの会話の全文が見られます。記録はこのパソコンのブラウザの中に保存され、外部のサーバーには送っていません。</a:t>
             </a:r>
             <a:endParaRPr lang="en-US" dirty="0"/>
           </a:p>
@@ -1133,7 +1134,7 @@
           <a:p>
             <a:r>
               <a:rPr lang="en-US" dirty="0"/>
-              <a:t>まとめです。AIが最初の電話から予約までを担当し、断られても切り返し、聞くべきことを必ず聞き、言ってはいけない表現は止めます。その分、人は商談という一番大切な場面に集中できます。</a:t>
+              <a:t>現在はパソコンの画面上で動くデモの段階です。マイクに話しかけて、AIとの会話を体験できます。次の段階では実際の電話回線とつなぎ、本物の電話で試していきます。</a:t>
             </a:r>
             <a:endParaRPr lang="en-US" dirty="0"/>
           </a:p>
@@ -1157,6 +1158,94 @@
             <a:fld id="{F7021451-1387-4CA6-816F-3879F97B5CBC}" type="slidenum">
               <a:rPr lang="en-US"/>
               <a:t>16</a:t>
+            </a:fld>
+            <a:endParaRPr lang="en-US"/>
+          </a:p>
+        </p:txBody>
+      </p:sp>
+    </p:spTree>
+    <p:extLst>
+      <p:ext uri="{BB962C8B-B14F-4D97-AF65-F5344CB8AC3E}">
+        <p14:creationId xmlns:p14="http://schemas.microsoft.com/office/powerpoint/2010/main" val="1024086991"/>
+      </p:ext>
+    </p:extLst>
+  </p:cSld>
+  <p:clrMapOvr>
+    <a:masterClrMapping/>
+  </p:clrMapOvr>
+</p:notes>
+</file>
+
+<file path=ppt/notesSlides/notesSlide17.xml><?xml version="1.0" encoding="utf-8"?>
+<p:notes xmlns:a="http://schemas.openxmlformats.org/drawingml/2006/main" xmlns:r="http://schemas.openxmlformats.org/officeDocument/2006/relationships" xmlns:p="http://schemas.openxmlformats.org/presentationml/2006/main">
+  <p:cSld>
+    <p:spTree>
+      <p:nvGrpSpPr>
+        <p:cNvPr id="1" name=""/>
+        <p:cNvGrpSpPr/>
+        <p:nvPr/>
+      </p:nvGrpSpPr>
+      <p:grpSpPr>
+        <a:xfrm>
+          <a:off x="0" y="0"/>
+          <a:ext cx="0" cy="0"/>
+          <a:chOff x="0" y="0"/>
+          <a:chExt cx="0" cy="0"/>
+        </a:xfrm>
+      </p:grpSpPr>
+      <p:sp>
+        <p:nvSpPr>
+          <p:cNvPr id="2" name="Slide Image Placeholder 1"/>
+          <p:cNvSpPr>
+            <a:spLocks noGrp="1" noRot="1" noChangeAspect="1"/>
+          </p:cNvSpPr>
+          <p:nvPr>
+            <p:ph type="sldImg"/>
+          </p:nvPr>
+        </p:nvSpPr>
+        <p:spPr/>
+      </p:sp>
+      <p:sp>
+        <p:nvSpPr>
+          <p:cNvPr id="3" name="Notes Placeholder 2"/>
+          <p:cNvSpPr>
+            <a:spLocks noGrp="1"/>
+          </p:cNvSpPr>
+          <p:nvPr>
+            <p:ph type="body" idx="1"/>
+          </p:nvPr>
+        </p:nvSpPr>
+        <p:spPr/>
+        <p:txBody>
+          <a:bodyPr/>
+          <a:lstStyle/>
+          <a:p>
+            <a:r>
+              <a:rPr lang="en-US" dirty="0"/>
+              <a:t>まとめです。AIが最初の電話から予約までを担当し、断られても切り返し、聞くべきことを必ず聞き、言ってはいけない表現は止めます。その分、人は商談という一番大切な場面に集中できます。</a:t>
+            </a:r>
+            <a:endParaRPr lang="en-US" dirty="0"/>
+          </a:p>
+        </p:txBody>
+      </p:sp>
+      <p:sp>
+        <p:nvSpPr>
+          <p:cNvPr id="4" name="Slide Number Placeholder 3"/>
+          <p:cNvSpPr>
+            <a:spLocks noGrp="1"/>
+          </p:cNvSpPr>
+          <p:nvPr>
+            <p:ph type="sldNum" sz="quarter" idx="10"/>
+          </p:nvPr>
+        </p:nvSpPr>
+        <p:spPr/>
+        <p:txBody>
+          <a:bodyPr/>
+          <a:lstStyle/>
+          <a:p>
+            <a:fld id="{F7021451-1387-4CA6-816F-3879F97B5CBC}" type="slidenum">
+              <a:rPr lang="en-US"/>
+              <a:t>17</a:t>
             </a:fld>
             <a:endParaRPr lang="en-US"/>
           </a:p>
@@ -1661,7 +1750,7 @@
           <a:p>
             <a:r>
               <a:rPr lang="en-US" dirty="0"/>
-              <a:t>タイプAの電話1本の流れです。受付に取り次いでもらい、用件を伝え、人数や決算月などを聞きながら、商談の日時を決めます。最後にカレンダーへの登録をお願いして終わります。途中で断られたときの動きは次のページです。</a:t>
+              <a:t>タイプAの電話1本の流れです。受付に取り次いでもらったら、保留の間は黙って待ち、担当者が出たら改めて名乗ってから用件を伝えます。そのあと人数や決算月などを聞きながら商談の日時を決め、最後にカレンダーへの登録をお願いして終わります。途中で断られたときの動きは次のページです。</a:t>
             </a:r>
             <a:endParaRPr lang="en-US" dirty="0"/>
           </a:p>
@@ -3022,7 +3111,7 @@
                 <a:ea typeface="Meiryo" pitchFamily="34" charset="-122"/>
                 <a:cs typeface="Meiryo" pitchFamily="34" charset="-120"/>
               </a:rPr>
-              <a:t>10 / 16</a:t>
+              <a:t>10 / 17</a:t>
             </a:r>
             <a:endParaRPr lang="en-US" sz="900" dirty="0"/>
           </a:p>
@@ -4779,7 +4868,7 @@
                 <a:ea typeface="Meiryo" pitchFamily="34" charset="-122"/>
                 <a:cs typeface="Meiryo" pitchFamily="34" charset="-120"/>
               </a:rPr>
-              <a:t>11 / 16</a:t>
+              <a:t>11 / 17</a:t>
             </a:r>
             <a:endParaRPr lang="en-US" sz="900" dirty="0"/>
           </a:p>
@@ -5575,7 +5664,7 @@
         <p:spPr>
           <a:xfrm>
             <a:off x="457200" y="3657600"/>
-            <a:ext cx="8229600" cy="513620"/>
+            <a:ext cx="8229600" cy="496111"/>
           </a:xfrm>
           <a:prstGeom prst="rect">
             <a:avLst/>
@@ -5791,7 +5880,7 @@
                 <a:ea typeface="Meiryo" pitchFamily="34" charset="-122"/>
                 <a:cs typeface="Meiryo" pitchFamily="34" charset="-120"/>
               </a:rPr>
-              <a:t>12 / 16</a:t>
+              <a:t>12 / 17</a:t>
             </a:r>
             <a:endParaRPr lang="en-US" sz="900" dirty="0"/>
           </a:p>
@@ -5799,7 +5888,7 @@
       </p:sp>
       <p:pic>
         <p:nvPicPr>
-          <p:cNvPr id="6" name="Image 0" descr="/private/tmp/claude-501/-Users-yobi-Library-Application-Support-Claude-scratch-workspaces-29465965-2f03-4e81-863e-b7d986ac8045-a348629c-b708-41f3-b05e-6c26349c2414-scratch-2026-09-11-312b50/a37084cd-5e75-454a-9db6-402fcdcf99ba/scratchpad/deck/shots/a_done_top.png">    </p:cNvPr>
+          <p:cNvPr id="6" name="Image 0" descr="/private/tmp/claude-501/-Users-yobi-Library-Application-Support-Claude-scratch-workspaces-29465965-2f03-4e81-863e-b7d986ac8045-a348629c-b708-41f3-b05e-6c26349c2414-scratch-2026-09-11-312b50/a37084cd-5e75-454a-9db6-402fcdcf99ba/scratchpad/deck/shots3/a_done_top.png">    </p:cNvPr>
           <p:cNvPicPr>
             <a:picLocks noChangeAspect="1"/>
           </p:cNvPicPr>
@@ -5851,7 +5940,7 @@
         </p:nvSpPr>
         <p:spPr>
           <a:xfrm>
-            <a:off x="1359530" y="1345883"/>
+            <a:off x="5490972" y="1163574"/>
             <a:ext cx="274320" cy="274320"/>
           </a:xfrm>
           <a:prstGeom prst="ellipse">
@@ -5876,7 +5965,7 @@
         </p:nvSpPr>
         <p:spPr>
           <a:xfrm>
-            <a:off x="1359530" y="1345883"/>
+            <a:off x="5490972" y="1163574"/>
             <a:ext cx="274320" cy="274320"/>
           </a:xfrm>
           <a:prstGeom prst="rect">
@@ -5915,7 +6004,7 @@
         </p:nvSpPr>
         <p:spPr>
           <a:xfrm>
-            <a:off x="1709562" y="1345883"/>
+            <a:off x="1359530" y="1422121"/>
             <a:ext cx="274320" cy="274320"/>
           </a:xfrm>
           <a:prstGeom prst="ellipse">
@@ -5940,7 +6029,7 @@
         </p:nvSpPr>
         <p:spPr>
           <a:xfrm>
-            <a:off x="1709562" y="1345883"/>
+            <a:off x="1359530" y="1422121"/>
             <a:ext cx="274320" cy="274320"/>
           </a:xfrm>
           <a:prstGeom prst="rect">
@@ -5979,7 +6068,7 @@
         </p:nvSpPr>
         <p:spPr>
           <a:xfrm>
-            <a:off x="4138574" y="2124837"/>
+            <a:off x="1683045" y="1422121"/>
             <a:ext cx="274320" cy="274320"/>
           </a:xfrm>
           <a:prstGeom prst="ellipse">
@@ -6004,7 +6093,7 @@
         </p:nvSpPr>
         <p:spPr>
           <a:xfrm>
-            <a:off x="4138574" y="2124837"/>
+            <a:off x="1683045" y="1422121"/>
             <a:ext cx="274320" cy="274320"/>
           </a:xfrm>
           <a:prstGeom prst="rect">
@@ -6043,7 +6132,7 @@
         </p:nvSpPr>
         <p:spPr>
           <a:xfrm>
-            <a:off x="2229307" y="2980030"/>
+            <a:off x="4032504" y="2257425"/>
             <a:ext cx="274320" cy="274320"/>
           </a:xfrm>
           <a:prstGeom prst="ellipse">
@@ -6068,7 +6157,7 @@
         </p:nvSpPr>
         <p:spPr>
           <a:xfrm>
-            <a:off x="2229307" y="2980030"/>
+            <a:off x="4032504" y="2257425"/>
             <a:ext cx="274320" cy="274320"/>
           </a:xfrm>
           <a:prstGeom prst="rect">
@@ -6107,7 +6196,7 @@
         </p:nvSpPr>
         <p:spPr>
           <a:xfrm>
-            <a:off x="5358384" y="1710500"/>
+            <a:off x="1964131" y="2688336"/>
             <a:ext cx="274320" cy="274320"/>
           </a:xfrm>
           <a:prstGeom prst="ellipse">
@@ -6132,7 +6221,7 @@
         </p:nvSpPr>
         <p:spPr>
           <a:xfrm>
-            <a:off x="5358384" y="1710500"/>
+            <a:off x="1964131" y="2688336"/>
             <a:ext cx="274320" cy="274320"/>
           </a:xfrm>
           <a:prstGeom prst="rect">
@@ -6171,7 +6260,7 @@
         </p:nvSpPr>
         <p:spPr>
           <a:xfrm>
-            <a:off x="5358384" y="3152394"/>
+            <a:off x="5490972" y="1859661"/>
             <a:ext cx="274320" cy="274320"/>
           </a:xfrm>
           <a:prstGeom prst="ellipse">
@@ -6196,7 +6285,7 @@
         </p:nvSpPr>
         <p:spPr>
           <a:xfrm>
-            <a:off x="5358384" y="3152394"/>
+            <a:off x="5490972" y="1859661"/>
             <a:ext cx="274320" cy="274320"/>
           </a:xfrm>
           <a:prstGeom prst="rect">
@@ -6235,7 +6324,7 @@
         </p:nvSpPr>
         <p:spPr>
           <a:xfrm>
-            <a:off x="6035040" y="1344168"/>
+            <a:off x="5490972" y="3298241"/>
             <a:ext cx="274320" cy="274320"/>
           </a:xfrm>
           <a:prstGeom prst="ellipse">
@@ -6260,7 +6349,7 @@
         </p:nvSpPr>
         <p:spPr>
           <a:xfrm>
-            <a:off x="6035040" y="1344168"/>
+            <a:off x="5490972" y="3298241"/>
             <a:ext cx="274320" cy="274320"/>
           </a:xfrm>
           <a:prstGeom prst="rect">
@@ -6285,7 +6374,7 @@
                 <a:ea typeface="Meiryo" pitchFamily="34" charset="-122"/>
                 <a:cs typeface="Meiryo" pitchFamily="34" charset="-120"/>
               </a:rPr>
-              <a:t>1</a:t>
+              <a:t>7</a:t>
             </a:r>
             <a:endParaRPr lang="en-US" sz="1100" dirty="0"/>
           </a:p>
@@ -6293,52 +6382,13 @@
       </p:sp>
       <p:sp>
         <p:nvSpPr>
-          <p:cNvPr id="22" name="Text 19"/>
-          <p:cNvSpPr txBox="1"/>
-          <p:nvPr/>
-        </p:nvSpPr>
-        <p:spPr>
-          <a:xfrm>
-            <a:off x="6446520" y="1234440"/>
-            <a:ext cx="2240280" cy="502920"/>
-          </a:xfrm>
-          <a:prstGeom prst="rect">
-            <a:avLst/>
-          </a:prstGeom>
-          <a:noFill/>
-          <a:ln/>
-        </p:spPr>
-        <p:txBody>
-          <a:bodyPr wrap="square" lIns="0" tIns="0" rIns="0" bIns="0" rtlCol="0" anchor="ctr"/>
-          <a:lstStyle/>
-          <a:p>
-            <a:pPr indent="0" marL="0">
-              <a:buNone/>
-            </a:pPr>
-            <a:r>
-              <a:rPr lang="en-US" sz="1050" dirty="0">
-                <a:solidFill>
-                  <a:srgbClr val="1E2A30"/>
-                </a:solidFill>
-                <a:latin typeface="Meiryo" pitchFamily="34" charset="0"/>
-                <a:ea typeface="Meiryo" pitchFamily="34" charset="-122"/>
-                <a:cs typeface="Meiryo" pitchFamily="34" charset="-120"/>
-              </a:rPr>
-              <a:t>タイプの切り替え（A：アポ獲得／B：受付突破）</a:t>
-            </a:r>
-            <a:endParaRPr lang="en-US" sz="1050" dirty="0"/>
-          </a:p>
-        </p:txBody>
-      </p:sp>
-      <p:sp>
-        <p:nvSpPr>
-          <p:cNvPr id="23" name="Shape 20"/>
+          <p:cNvPr id="22" name="Shape 19"/>
           <p:cNvSpPr/>
           <p:nvPr/>
         </p:nvSpPr>
         <p:spPr>
           <a:xfrm>
-            <a:off x="6035040" y="1892808"/>
+            <a:off x="6035040" y="1325880"/>
             <a:ext cx="274320" cy="274320"/>
           </a:xfrm>
           <a:prstGeom prst="ellipse">
@@ -6357,14 +6407,53 @@
       </p:sp>
       <p:sp>
         <p:nvSpPr>
+          <p:cNvPr id="23" name="Text 20"/>
+          <p:cNvSpPr txBox="1"/>
+          <p:nvPr/>
+        </p:nvSpPr>
+        <p:spPr>
+          <a:xfrm>
+            <a:off x="6035040" y="1325880"/>
+            <a:ext cx="274320" cy="274320"/>
+          </a:xfrm>
+          <a:prstGeom prst="rect">
+            <a:avLst/>
+          </a:prstGeom>
+          <a:noFill/>
+          <a:ln/>
+        </p:spPr>
+        <p:txBody>
+          <a:bodyPr wrap="square" lIns="0" tIns="0" rIns="0" bIns="0" rtlCol="0" anchor="ctr"/>
+          <a:lstStyle/>
+          <a:p>
+            <a:pPr algn="ctr" indent="0" marL="0">
+              <a:buNone/>
+            </a:pPr>
+            <a:r>
+              <a:rPr lang="en-US" sz="1100" b="1" dirty="0">
+                <a:solidFill>
+                  <a:srgbClr val="FFFFFF"/>
+                </a:solidFill>
+                <a:latin typeface="Meiryo" pitchFamily="34" charset="0"/>
+                <a:ea typeface="Meiryo" pitchFamily="34" charset="-122"/>
+                <a:cs typeface="Meiryo" pitchFamily="34" charset="-120"/>
+              </a:rPr>
+              <a:t>1</a:t>
+            </a:r>
+            <a:endParaRPr lang="en-US" sz="1100" dirty="0"/>
+          </a:p>
+        </p:txBody>
+      </p:sp>
+      <p:sp>
+        <p:nvSpPr>
           <p:cNvPr id="24" name="Text 21"/>
           <p:cNvSpPr txBox="1"/>
           <p:nvPr/>
         </p:nvSpPr>
         <p:spPr>
           <a:xfrm>
-            <a:off x="6035040" y="1892808"/>
-            <a:ext cx="274320" cy="274320"/>
+            <a:off x="6446520" y="1234440"/>
+            <a:ext cx="2240280" cy="457200"/>
           </a:xfrm>
           <a:prstGeom prst="rect">
             <a:avLst/>
@@ -6376,50 +6465,11 @@
           <a:bodyPr wrap="square" lIns="0" tIns="0" rIns="0" bIns="0" rtlCol="0" anchor="ctr"/>
           <a:lstStyle/>
           <a:p>
-            <a:pPr algn="ctr" indent="0" marL="0">
-              <a:buNone/>
-            </a:pPr>
-            <a:r>
-              <a:rPr lang="en-US" sz="1100" b="1" dirty="0">
-                <a:solidFill>
-                  <a:srgbClr val="FFFFFF"/>
-                </a:solidFill>
-                <a:latin typeface="Meiryo" pitchFamily="34" charset="0"/>
-                <a:ea typeface="Meiryo" pitchFamily="34" charset="-122"/>
-                <a:cs typeface="Meiryo" pitchFamily="34" charset="-120"/>
-              </a:rPr>
-              <a:t>2</a:t>
-            </a:r>
-            <a:endParaRPr lang="en-US" sz="1100" dirty="0"/>
-          </a:p>
-        </p:txBody>
-      </p:sp>
-      <p:sp>
-        <p:nvSpPr>
-          <p:cNvPr id="25" name="Text 22"/>
-          <p:cNvSpPr txBox="1"/>
-          <p:nvPr/>
-        </p:nvSpPr>
-        <p:spPr>
-          <a:xfrm>
-            <a:off x="6446520" y="1783080"/>
-            <a:ext cx="2240280" cy="502920"/>
-          </a:xfrm>
-          <a:prstGeom prst="rect">
-            <a:avLst/>
-          </a:prstGeom>
-          <a:noFill/>
-          <a:ln/>
-        </p:spPr>
-        <p:txBody>
-          <a:bodyPr wrap="square" lIns="0" tIns="0" rIns="0" bIns="0" rtlCol="0" anchor="ctr"/>
-          <a:lstStyle/>
-          <a:p>
             <a:pPr indent="0" marL="0">
               <a:buNone/>
             </a:pPr>
             <a:r>
-              <a:rPr lang="en-US" sz="1050" dirty="0">
+              <a:rPr lang="en-US" sz="1000" dirty="0">
                 <a:solidFill>
                   <a:srgbClr val="1E2A30"/>
                 </a:solidFill>
@@ -6427,21 +6477,21 @@
                 <a:ea typeface="Meiryo" pitchFamily="34" charset="-122"/>
                 <a:cs typeface="Meiryo" pitchFamily="34" charset="-120"/>
               </a:rPr>
-              <a:t>通話開始・話すボタン</a:t>
-            </a:r>
-            <a:endParaRPr lang="en-US" sz="1050" dirty="0"/>
-          </a:p>
-        </p:txBody>
-      </p:sp>
-      <p:sp>
-        <p:nvSpPr>
-          <p:cNvPr id="26" name="Shape 23"/>
+              <a:t>表示の切り替え（通話デモ／架電履歴）</a:t>
+            </a:r>
+            <a:endParaRPr lang="en-US" sz="1000" dirty="0"/>
+          </a:p>
+        </p:txBody>
+      </p:sp>
+      <p:sp>
+        <p:nvSpPr>
+          <p:cNvPr id="25" name="Shape 22"/>
           <p:cNvSpPr/>
           <p:nvPr/>
         </p:nvSpPr>
         <p:spPr>
           <a:xfrm>
-            <a:off x="6035040" y="2441448"/>
+            <a:off x="6035040" y="1801368"/>
             <a:ext cx="274320" cy="274320"/>
           </a:xfrm>
           <a:prstGeom prst="ellipse">
@@ -6460,14 +6510,53 @@
       </p:sp>
       <p:sp>
         <p:nvSpPr>
+          <p:cNvPr id="26" name="Text 23"/>
+          <p:cNvSpPr txBox="1"/>
+          <p:nvPr/>
+        </p:nvSpPr>
+        <p:spPr>
+          <a:xfrm>
+            <a:off x="6035040" y="1801368"/>
+            <a:ext cx="274320" cy="274320"/>
+          </a:xfrm>
+          <a:prstGeom prst="rect">
+            <a:avLst/>
+          </a:prstGeom>
+          <a:noFill/>
+          <a:ln/>
+        </p:spPr>
+        <p:txBody>
+          <a:bodyPr wrap="square" lIns="0" tIns="0" rIns="0" bIns="0" rtlCol="0" anchor="ctr"/>
+          <a:lstStyle/>
+          <a:p>
+            <a:pPr algn="ctr" indent="0" marL="0">
+              <a:buNone/>
+            </a:pPr>
+            <a:r>
+              <a:rPr lang="en-US" sz="1100" b="1" dirty="0">
+                <a:solidFill>
+                  <a:srgbClr val="FFFFFF"/>
+                </a:solidFill>
+                <a:latin typeface="Meiryo" pitchFamily="34" charset="0"/>
+                <a:ea typeface="Meiryo" pitchFamily="34" charset="-122"/>
+                <a:cs typeface="Meiryo" pitchFamily="34" charset="-120"/>
+              </a:rPr>
+              <a:t>2</a:t>
+            </a:r>
+            <a:endParaRPr lang="en-US" sz="1100" dirty="0"/>
+          </a:p>
+        </p:txBody>
+      </p:sp>
+      <p:sp>
+        <p:nvSpPr>
           <p:cNvPr id="27" name="Text 24"/>
           <p:cNvSpPr txBox="1"/>
           <p:nvPr/>
         </p:nvSpPr>
         <p:spPr>
           <a:xfrm>
-            <a:off x="6035040" y="2441448"/>
-            <a:ext cx="274320" cy="274320"/>
+            <a:off x="6446520" y="1709928"/>
+            <a:ext cx="2240280" cy="457200"/>
           </a:xfrm>
           <a:prstGeom prst="rect">
             <a:avLst/>
@@ -6479,50 +6568,11 @@
           <a:bodyPr wrap="square" lIns="0" tIns="0" rIns="0" bIns="0" rtlCol="0" anchor="ctr"/>
           <a:lstStyle/>
           <a:p>
-            <a:pPr algn="ctr" indent="0" marL="0">
-              <a:buNone/>
-            </a:pPr>
-            <a:r>
-              <a:rPr lang="en-US" sz="1100" b="1" dirty="0">
-                <a:solidFill>
-                  <a:srgbClr val="FFFFFF"/>
-                </a:solidFill>
-                <a:latin typeface="Meiryo" pitchFamily="34" charset="0"/>
-                <a:ea typeface="Meiryo" pitchFamily="34" charset="-122"/>
-                <a:cs typeface="Meiryo" pitchFamily="34" charset="-120"/>
-              </a:rPr>
-              <a:t>3</a:t>
-            </a:r>
-            <a:endParaRPr lang="en-US" sz="1100" dirty="0"/>
-          </a:p>
-        </p:txBody>
-      </p:sp>
-      <p:sp>
-        <p:nvSpPr>
-          <p:cNvPr id="28" name="Text 25"/>
-          <p:cNvSpPr txBox="1"/>
-          <p:nvPr/>
-        </p:nvSpPr>
-        <p:spPr>
-          <a:xfrm>
-            <a:off x="6446520" y="2331720"/>
-            <a:ext cx="2240280" cy="502920"/>
-          </a:xfrm>
-          <a:prstGeom prst="rect">
-            <a:avLst/>
-          </a:prstGeom>
-          <a:noFill/>
-          <a:ln/>
-        </p:spPr>
-        <p:txBody>
-          <a:bodyPr wrap="square" lIns="0" tIns="0" rIns="0" bIns="0" rtlCol="0" anchor="ctr"/>
-          <a:lstStyle/>
-          <a:p>
             <a:pPr indent="0" marL="0">
               <a:buNone/>
             </a:pPr>
             <a:r>
-              <a:rPr lang="en-US" sz="1050" dirty="0">
+              <a:rPr lang="en-US" sz="1000" dirty="0">
                 <a:solidFill>
                   <a:srgbClr val="1E2A30"/>
                 </a:solidFill>
@@ -6530,21 +6580,21 @@
                 <a:ea typeface="Meiryo" pitchFamily="34" charset="-122"/>
                 <a:cs typeface="Meiryo" pitchFamily="34" charset="-120"/>
               </a:rPr>
-              <a:t>会話の記録（緑＝AI、黄＝相手）</a:t>
-            </a:r>
-            <a:endParaRPr lang="en-US" sz="1050" dirty="0"/>
-          </a:p>
-        </p:txBody>
-      </p:sp>
-      <p:sp>
-        <p:nvSpPr>
-          <p:cNvPr id="29" name="Shape 26"/>
+              <a:t>タイプの切り替え（A：アポ獲得／B：受付突破）</a:t>
+            </a:r>
+            <a:endParaRPr lang="en-US" sz="1000" dirty="0"/>
+          </a:p>
+        </p:txBody>
+      </p:sp>
+      <p:sp>
+        <p:nvSpPr>
+          <p:cNvPr id="28" name="Shape 25"/>
           <p:cNvSpPr/>
           <p:nvPr/>
         </p:nvSpPr>
         <p:spPr>
           <a:xfrm>
-            <a:off x="6035040" y="2990088"/>
+            <a:off x="6035040" y="2276856"/>
             <a:ext cx="274320" cy="274320"/>
           </a:xfrm>
           <a:prstGeom prst="ellipse">
@@ -6563,14 +6613,53 @@
       </p:sp>
       <p:sp>
         <p:nvSpPr>
+          <p:cNvPr id="29" name="Text 26"/>
+          <p:cNvSpPr txBox="1"/>
+          <p:nvPr/>
+        </p:nvSpPr>
+        <p:spPr>
+          <a:xfrm>
+            <a:off x="6035040" y="2276856"/>
+            <a:ext cx="274320" cy="274320"/>
+          </a:xfrm>
+          <a:prstGeom prst="rect">
+            <a:avLst/>
+          </a:prstGeom>
+          <a:noFill/>
+          <a:ln/>
+        </p:spPr>
+        <p:txBody>
+          <a:bodyPr wrap="square" lIns="0" tIns="0" rIns="0" bIns="0" rtlCol="0" anchor="ctr"/>
+          <a:lstStyle/>
+          <a:p>
+            <a:pPr algn="ctr" indent="0" marL="0">
+              <a:buNone/>
+            </a:pPr>
+            <a:r>
+              <a:rPr lang="en-US" sz="1100" b="1" dirty="0">
+                <a:solidFill>
+                  <a:srgbClr val="FFFFFF"/>
+                </a:solidFill>
+                <a:latin typeface="Meiryo" pitchFamily="34" charset="0"/>
+                <a:ea typeface="Meiryo" pitchFamily="34" charset="-122"/>
+                <a:cs typeface="Meiryo" pitchFamily="34" charset="-120"/>
+              </a:rPr>
+              <a:t>3</a:t>
+            </a:r>
+            <a:endParaRPr lang="en-US" sz="1100" dirty="0"/>
+          </a:p>
+        </p:txBody>
+      </p:sp>
+      <p:sp>
+        <p:nvSpPr>
           <p:cNvPr id="30" name="Text 27"/>
           <p:cNvSpPr txBox="1"/>
           <p:nvPr/>
         </p:nvSpPr>
         <p:spPr>
           <a:xfrm>
-            <a:off x="6035040" y="2990088"/>
-            <a:ext cx="274320" cy="274320"/>
+            <a:off x="6446520" y="2185416"/>
+            <a:ext cx="2240280" cy="457200"/>
           </a:xfrm>
           <a:prstGeom prst="rect">
             <a:avLst/>
@@ -6582,50 +6671,11 @@
           <a:bodyPr wrap="square" lIns="0" tIns="0" rIns="0" bIns="0" rtlCol="0" anchor="ctr"/>
           <a:lstStyle/>
           <a:p>
-            <a:pPr algn="ctr" indent="0" marL="0">
-              <a:buNone/>
-            </a:pPr>
-            <a:r>
-              <a:rPr lang="en-US" sz="1100" b="1" dirty="0">
-                <a:solidFill>
-                  <a:srgbClr val="FFFFFF"/>
-                </a:solidFill>
-                <a:latin typeface="Meiryo" pitchFamily="34" charset="0"/>
-                <a:ea typeface="Meiryo" pitchFamily="34" charset="-122"/>
-                <a:cs typeface="Meiryo" pitchFamily="34" charset="-120"/>
-              </a:rPr>
-              <a:t>4</a:t>
-            </a:r>
-            <a:endParaRPr lang="en-US" sz="1100" dirty="0"/>
-          </a:p>
-        </p:txBody>
-      </p:sp>
-      <p:sp>
-        <p:nvSpPr>
-          <p:cNvPr id="31" name="Text 28"/>
-          <p:cNvSpPr txBox="1"/>
-          <p:nvPr/>
-        </p:nvSpPr>
-        <p:spPr>
-          <a:xfrm>
-            <a:off x="6446520" y="2880360"/>
-            <a:ext cx="2240280" cy="502920"/>
-          </a:xfrm>
-          <a:prstGeom prst="rect">
-            <a:avLst/>
-          </a:prstGeom>
-          <a:noFill/>
-          <a:ln/>
-        </p:spPr>
-        <p:txBody>
-          <a:bodyPr wrap="square" lIns="0" tIns="0" rIns="0" bIns="0" rtlCol="0" anchor="ctr"/>
-          <a:lstStyle/>
-          <a:p>
             <a:pPr indent="0" marL="0">
               <a:buNone/>
             </a:pPr>
             <a:r>
-              <a:rPr lang="en-US" sz="1050" dirty="0">
+              <a:rPr lang="en-US" sz="1000" dirty="0">
                 <a:solidFill>
                   <a:srgbClr val="1E2A30"/>
                 </a:solidFill>
@@ -6633,21 +6683,21 @@
                 <a:ea typeface="Meiryo" pitchFamily="34" charset="-122"/>
                 <a:cs typeface="Meiryo" pitchFamily="34" charset="-120"/>
               </a:rPr>
-              <a:t>AI が判断した理由（なぜそう返したか）</a:t>
-            </a:r>
-            <a:endParaRPr lang="en-US" sz="1050" dirty="0"/>
-          </a:p>
-        </p:txBody>
-      </p:sp>
-      <p:sp>
-        <p:nvSpPr>
-          <p:cNvPr id="32" name="Shape 29"/>
+              <a:t>通話開始・話すボタン</a:t>
+            </a:r>
+            <a:endParaRPr lang="en-US" sz="1000" dirty="0"/>
+          </a:p>
+        </p:txBody>
+      </p:sp>
+      <p:sp>
+        <p:nvSpPr>
+          <p:cNvPr id="31" name="Shape 28"/>
           <p:cNvSpPr/>
           <p:nvPr/>
         </p:nvSpPr>
         <p:spPr>
           <a:xfrm>
-            <a:off x="6035040" y="3538728"/>
+            <a:off x="6035040" y="2752344"/>
             <a:ext cx="274320" cy="274320"/>
           </a:xfrm>
           <a:prstGeom prst="ellipse">
@@ -6666,14 +6716,53 @@
       </p:sp>
       <p:sp>
         <p:nvSpPr>
+          <p:cNvPr id="32" name="Text 29"/>
+          <p:cNvSpPr txBox="1"/>
+          <p:nvPr/>
+        </p:nvSpPr>
+        <p:spPr>
+          <a:xfrm>
+            <a:off x="6035040" y="2752344"/>
+            <a:ext cx="274320" cy="274320"/>
+          </a:xfrm>
+          <a:prstGeom prst="rect">
+            <a:avLst/>
+          </a:prstGeom>
+          <a:noFill/>
+          <a:ln/>
+        </p:spPr>
+        <p:txBody>
+          <a:bodyPr wrap="square" lIns="0" tIns="0" rIns="0" bIns="0" rtlCol="0" anchor="ctr"/>
+          <a:lstStyle/>
+          <a:p>
+            <a:pPr algn="ctr" indent="0" marL="0">
+              <a:buNone/>
+            </a:pPr>
+            <a:r>
+              <a:rPr lang="en-US" sz="1100" b="1" dirty="0">
+                <a:solidFill>
+                  <a:srgbClr val="FFFFFF"/>
+                </a:solidFill>
+                <a:latin typeface="Meiryo" pitchFamily="34" charset="0"/>
+                <a:ea typeface="Meiryo" pitchFamily="34" charset="-122"/>
+                <a:cs typeface="Meiryo" pitchFamily="34" charset="-120"/>
+              </a:rPr>
+              <a:t>4</a:t>
+            </a:r>
+            <a:endParaRPr lang="en-US" sz="1100" dirty="0"/>
+          </a:p>
+        </p:txBody>
+      </p:sp>
+      <p:sp>
+        <p:nvSpPr>
           <p:cNvPr id="33" name="Text 30"/>
           <p:cNvSpPr txBox="1"/>
           <p:nvPr/>
         </p:nvSpPr>
         <p:spPr>
           <a:xfrm>
-            <a:off x="6035040" y="3538728"/>
-            <a:ext cx="274320" cy="274320"/>
+            <a:off x="6446520" y="2660904"/>
+            <a:ext cx="2240280" cy="457200"/>
           </a:xfrm>
           <a:prstGeom prst="rect">
             <a:avLst/>
@@ -6685,50 +6774,11 @@
           <a:bodyPr wrap="square" lIns="0" tIns="0" rIns="0" bIns="0" rtlCol="0" anchor="ctr"/>
           <a:lstStyle/>
           <a:p>
-            <a:pPr algn="ctr" indent="0" marL="0">
-              <a:buNone/>
-            </a:pPr>
-            <a:r>
-              <a:rPr lang="en-US" sz="1100" b="1" dirty="0">
-                <a:solidFill>
-                  <a:srgbClr val="FFFFFF"/>
-                </a:solidFill>
-                <a:latin typeface="Meiryo" pitchFamily="34" charset="0"/>
-                <a:ea typeface="Meiryo" pitchFamily="34" charset="-122"/>
-                <a:cs typeface="Meiryo" pitchFamily="34" charset="-120"/>
-              </a:rPr>
-              <a:t>5</a:t>
-            </a:r>
-            <a:endParaRPr lang="en-US" sz="1100" dirty="0"/>
-          </a:p>
-        </p:txBody>
-      </p:sp>
-      <p:sp>
-        <p:nvSpPr>
-          <p:cNvPr id="34" name="Text 31"/>
-          <p:cNvSpPr txBox="1"/>
-          <p:nvPr/>
-        </p:nvSpPr>
-        <p:spPr>
-          <a:xfrm>
-            <a:off x="6446520" y="3429000"/>
-            <a:ext cx="2240280" cy="502920"/>
-          </a:xfrm>
-          <a:prstGeom prst="rect">
-            <a:avLst/>
-          </a:prstGeom>
-          <a:noFill/>
-          <a:ln/>
-        </p:spPr>
-        <p:txBody>
-          <a:bodyPr wrap="square" lIns="0" tIns="0" rIns="0" bIns="0" rtlCol="0" anchor="ctr"/>
-          <a:lstStyle/>
-          <a:p>
             <a:pPr indent="0" marL="0">
               <a:buNone/>
             </a:pPr>
             <a:r>
-              <a:rPr lang="en-US" sz="1050" dirty="0">
+              <a:rPr lang="en-US" sz="1000" dirty="0">
                 <a:solidFill>
                   <a:srgbClr val="1E2A30"/>
                 </a:solidFill>
@@ -6736,21 +6786,21 @@
                 <a:ea typeface="Meiryo" pitchFamily="34" charset="-122"/>
                 <a:cs typeface="Meiryo" pitchFamily="34" charset="-120"/>
               </a:rPr>
-              <a:t>いま電話のどの段階か</a:t>
-            </a:r>
-            <a:endParaRPr lang="en-US" sz="1050" dirty="0"/>
-          </a:p>
-        </p:txBody>
-      </p:sp>
-      <p:sp>
-        <p:nvSpPr>
-          <p:cNvPr id="35" name="Shape 32"/>
+              <a:t>会話の記録（緑＝AI、黄＝相手）</a:t>
+            </a:r>
+            <a:endParaRPr lang="en-US" sz="1000" dirty="0"/>
+          </a:p>
+        </p:txBody>
+      </p:sp>
+      <p:sp>
+        <p:nvSpPr>
+          <p:cNvPr id="34" name="Shape 31"/>
           <p:cNvSpPr/>
           <p:nvPr/>
         </p:nvSpPr>
         <p:spPr>
           <a:xfrm>
-            <a:off x="6035040" y="4087368"/>
+            <a:off x="6035040" y="3227832"/>
             <a:ext cx="274320" cy="274320"/>
           </a:xfrm>
           <a:prstGeom prst="ellipse">
@@ -6769,15 +6819,118 @@
       </p:sp>
       <p:sp>
         <p:nvSpPr>
+          <p:cNvPr id="35" name="Text 32"/>
+          <p:cNvSpPr txBox="1"/>
+          <p:nvPr/>
+        </p:nvSpPr>
+        <p:spPr>
+          <a:xfrm>
+            <a:off x="6035040" y="3227832"/>
+            <a:ext cx="274320" cy="274320"/>
+          </a:xfrm>
+          <a:prstGeom prst="rect">
+            <a:avLst/>
+          </a:prstGeom>
+          <a:noFill/>
+          <a:ln/>
+        </p:spPr>
+        <p:txBody>
+          <a:bodyPr wrap="square" lIns="0" tIns="0" rIns="0" bIns="0" rtlCol="0" anchor="ctr"/>
+          <a:lstStyle/>
+          <a:p>
+            <a:pPr algn="ctr" indent="0" marL="0">
+              <a:buNone/>
+            </a:pPr>
+            <a:r>
+              <a:rPr lang="en-US" sz="1100" b="1" dirty="0">
+                <a:solidFill>
+                  <a:srgbClr val="FFFFFF"/>
+                </a:solidFill>
+                <a:latin typeface="Meiryo" pitchFamily="34" charset="0"/>
+                <a:ea typeface="Meiryo" pitchFamily="34" charset="-122"/>
+                <a:cs typeface="Meiryo" pitchFamily="34" charset="-120"/>
+              </a:rPr>
+              <a:t>5</a:t>
+            </a:r>
+            <a:endParaRPr lang="en-US" sz="1100" dirty="0"/>
+          </a:p>
+        </p:txBody>
+      </p:sp>
+      <p:sp>
+        <p:nvSpPr>
           <p:cNvPr id="36" name="Text 33"/>
           <p:cNvSpPr txBox="1"/>
           <p:nvPr/>
         </p:nvSpPr>
         <p:spPr>
           <a:xfrm>
-            <a:off x="6035040" y="4087368"/>
+            <a:off x="6446520" y="3136392"/>
+            <a:ext cx="2240280" cy="457200"/>
+          </a:xfrm>
+          <a:prstGeom prst="rect">
+            <a:avLst/>
+          </a:prstGeom>
+          <a:noFill/>
+          <a:ln/>
+        </p:spPr>
+        <p:txBody>
+          <a:bodyPr wrap="square" lIns="0" tIns="0" rIns="0" bIns="0" rtlCol="0" anchor="ctr"/>
+          <a:lstStyle/>
+          <a:p>
+            <a:pPr indent="0" marL="0">
+              <a:buNone/>
+            </a:pPr>
+            <a:r>
+              <a:rPr lang="en-US" sz="1000" dirty="0">
+                <a:solidFill>
+                  <a:srgbClr val="1E2A30"/>
+                </a:solidFill>
+                <a:latin typeface="Meiryo" pitchFamily="34" charset="0"/>
+                <a:ea typeface="Meiryo" pitchFamily="34" charset="-122"/>
+                <a:cs typeface="Meiryo" pitchFamily="34" charset="-120"/>
+              </a:rPr>
+              <a:t>AI が判断した理由（なぜそう返したか）</a:t>
+            </a:r>
+            <a:endParaRPr lang="en-US" sz="1000" dirty="0"/>
+          </a:p>
+        </p:txBody>
+      </p:sp>
+      <p:sp>
+        <p:nvSpPr>
+          <p:cNvPr id="37" name="Shape 34"/>
+          <p:cNvSpPr/>
+          <p:nvPr/>
+        </p:nvSpPr>
+        <p:spPr>
+          <a:xfrm>
+            <a:off x="6035040" y="3703320"/>
             <a:ext cx="274320" cy="274320"/>
           </a:xfrm>
+          <a:prstGeom prst="ellipse">
+            <a:avLst/>
+          </a:prstGeom>
+          <a:solidFill>
+            <a:srgbClr val="D98A1E"/>
+          </a:solidFill>
+          <a:ln w="19050">
+            <a:solidFill>
+              <a:srgbClr val="FFFFFF"/>
+            </a:solidFill>
+            <a:prstDash val="solid"/>
+          </a:ln>
+        </p:spPr>
+      </p:sp>
+      <p:sp>
+        <p:nvSpPr>
+          <p:cNvPr id="38" name="Text 35"/>
+          <p:cNvSpPr txBox="1"/>
+          <p:nvPr/>
+        </p:nvSpPr>
+        <p:spPr>
+          <a:xfrm>
+            <a:off x="6035040" y="3703320"/>
+            <a:ext cx="274320" cy="274320"/>
+          </a:xfrm>
           <a:prstGeom prst="rect">
             <a:avLst/>
           </a:prstGeom>
@@ -6808,14 +6961,14 @@
       </p:sp>
       <p:sp>
         <p:nvSpPr>
-          <p:cNvPr id="37" name="Text 34"/>
-          <p:cNvSpPr txBox="1"/>
-          <p:nvPr/>
-        </p:nvSpPr>
-        <p:spPr>
-          <a:xfrm>
-            <a:off x="6446520" y="3977640"/>
-            <a:ext cx="2240280" cy="502920"/>
+          <p:cNvPr id="39" name="Text 36"/>
+          <p:cNvSpPr txBox="1"/>
+          <p:nvPr/>
+        </p:nvSpPr>
+        <p:spPr>
+          <a:xfrm>
+            <a:off x="6446520" y="3611880"/>
+            <a:ext cx="2240280" cy="457200"/>
           </a:xfrm>
           <a:prstGeom prst="rect">
             <a:avLst/>
@@ -6831,7 +6984,7 @@
               <a:buNone/>
             </a:pPr>
             <a:r>
-              <a:rPr lang="en-US" sz="1050" dirty="0">
+              <a:rPr lang="en-US" sz="1000" dirty="0">
                 <a:solidFill>
                   <a:srgbClr val="1E2A30"/>
                 </a:solidFill>
@@ -6839,9 +6992,112 @@
                 <a:ea typeface="Meiryo" pitchFamily="34" charset="-122"/>
                 <a:cs typeface="Meiryo" pitchFamily="34" charset="-120"/>
               </a:rPr>
+              <a:t>いま電話のどの段階か</a:t>
+            </a:r>
+            <a:endParaRPr lang="en-US" sz="1000" dirty="0"/>
+          </a:p>
+        </p:txBody>
+      </p:sp>
+      <p:sp>
+        <p:nvSpPr>
+          <p:cNvPr id="40" name="Shape 37"/>
+          <p:cNvSpPr/>
+          <p:nvPr/>
+        </p:nvSpPr>
+        <p:spPr>
+          <a:xfrm>
+            <a:off x="6035040" y="4178808"/>
+            <a:ext cx="274320" cy="274320"/>
+          </a:xfrm>
+          <a:prstGeom prst="ellipse">
+            <a:avLst/>
+          </a:prstGeom>
+          <a:solidFill>
+            <a:srgbClr val="D98A1E"/>
+          </a:solidFill>
+          <a:ln w="19050">
+            <a:solidFill>
+              <a:srgbClr val="FFFFFF"/>
+            </a:solidFill>
+            <a:prstDash val="solid"/>
+          </a:ln>
+        </p:spPr>
+      </p:sp>
+      <p:sp>
+        <p:nvSpPr>
+          <p:cNvPr id="41" name="Text 38"/>
+          <p:cNvSpPr txBox="1"/>
+          <p:nvPr/>
+        </p:nvSpPr>
+        <p:spPr>
+          <a:xfrm>
+            <a:off x="6035040" y="4178808"/>
+            <a:ext cx="274320" cy="274320"/>
+          </a:xfrm>
+          <a:prstGeom prst="rect">
+            <a:avLst/>
+          </a:prstGeom>
+          <a:noFill/>
+          <a:ln/>
+        </p:spPr>
+        <p:txBody>
+          <a:bodyPr wrap="square" lIns="0" tIns="0" rIns="0" bIns="0" rtlCol="0" anchor="ctr"/>
+          <a:lstStyle/>
+          <a:p>
+            <a:pPr algn="ctr" indent="0" marL="0">
+              <a:buNone/>
+            </a:pPr>
+            <a:r>
+              <a:rPr lang="en-US" sz="1100" b="1" dirty="0">
+                <a:solidFill>
+                  <a:srgbClr val="FFFFFF"/>
+                </a:solidFill>
+                <a:latin typeface="Meiryo" pitchFamily="34" charset="0"/>
+                <a:ea typeface="Meiryo" pitchFamily="34" charset="-122"/>
+                <a:cs typeface="Meiryo" pitchFamily="34" charset="-120"/>
+              </a:rPr>
+              <a:t>7</a:t>
+            </a:r>
+            <a:endParaRPr lang="en-US" sz="1100" dirty="0"/>
+          </a:p>
+        </p:txBody>
+      </p:sp>
+      <p:sp>
+        <p:nvSpPr>
+          <p:cNvPr id="42" name="Text 39"/>
+          <p:cNvSpPr txBox="1"/>
+          <p:nvPr/>
+        </p:nvSpPr>
+        <p:spPr>
+          <a:xfrm>
+            <a:off x="6446520" y="4087368"/>
+            <a:ext cx="2240280" cy="457200"/>
+          </a:xfrm>
+          <a:prstGeom prst="rect">
+            <a:avLst/>
+          </a:prstGeom>
+          <a:noFill/>
+          <a:ln/>
+        </p:spPr>
+        <p:txBody>
+          <a:bodyPr wrap="square" lIns="0" tIns="0" rIns="0" bIns="0" rtlCol="0" anchor="ctr"/>
+          <a:lstStyle/>
+          <a:p>
+            <a:pPr indent="0" marL="0">
+              <a:buNone/>
+            </a:pPr>
+            <a:r>
+              <a:rPr lang="en-US" sz="1000" dirty="0">
+                <a:solidFill>
+                  <a:srgbClr val="1E2A30"/>
+                </a:solidFill>
+                <a:latin typeface="Meiryo" pitchFamily="34" charset="0"/>
+                <a:ea typeface="Meiryo" pitchFamily="34" charset="-122"/>
+                <a:cs typeface="Meiryo" pitchFamily="34" charset="-120"/>
+              </a:rPr>
               <a:t>7つの質問の聞き取り状況（○＝聞けた）</a:t>
             </a:r>
-            <a:endParaRPr lang="en-US" sz="1050" dirty="0"/>
+            <a:endParaRPr lang="en-US" sz="1000" dirty="0"/>
           </a:p>
         </p:txBody>
       </p:sp>
@@ -7015,7 +7271,7 @@
                 <a:ea typeface="Meiryo" pitchFamily="34" charset="-122"/>
                 <a:cs typeface="Meiryo" pitchFamily="34" charset="-120"/>
               </a:rPr>
-              <a:t>13 / 16</a:t>
+              <a:t>13 / 17</a:t>
             </a:r>
             <a:endParaRPr lang="en-US" sz="900" dirty="0"/>
           </a:p>
@@ -8062,7 +8318,7 @@
                 <a:ea typeface="Meiryo" pitchFamily="34" charset="-122"/>
                 <a:cs typeface="Meiryo" pitchFamily="34" charset="-120"/>
               </a:rPr>
-              <a:t>準備：Chrome・Edge・Safari で開き、マイクを「許可」してください。「リセット」で最初からやり直せます</a:t>
+              <a:t>準備：Chrome・Edge・Safari で開き、マイクを「許可」。終わった通話は「架電履歴」で見返せます</a:t>
             </a:r>
             <a:endParaRPr lang="en-US" sz="1050" dirty="0"/>
           </a:p>
@@ -8238,7 +8494,7 @@
                 <a:ea typeface="Meiryo" pitchFamily="34" charset="-122"/>
                 <a:cs typeface="Meiryo" pitchFamily="34" charset="-120"/>
               </a:rPr>
-              <a:t>14 / 16</a:t>
+              <a:t>14 / 17</a:t>
             </a:r>
             <a:endParaRPr lang="en-US" sz="900" dirty="0"/>
           </a:p>
@@ -9781,7 +10037,7 @@
                 <a:ea typeface="Meiryo" pitchFamily="34" charset="-122"/>
                 <a:cs typeface="Meiryo" pitchFamily="34" charset="-120"/>
               </a:rPr>
-              <a:t>※ デモ用の架空の会社・連絡先です</a:t>
+              <a:t>※ 架空の会社です。内容は架電履歴に自動保存されます</a:t>
             </a:r>
             <a:endParaRPr lang="en-US" sz="900" dirty="0"/>
           </a:p>
@@ -9828,7 +10084,7 @@
         <p:spPr>
           <a:xfrm>
             <a:off x="457200" y="310896"/>
-            <a:ext cx="548640" cy="256032"/>
+            <a:ext cx="685800" cy="256032"/>
           </a:xfrm>
           <a:prstGeom prst="roundRect">
             <a:avLst>
@@ -9855,7 +10111,7 @@
         <p:spPr>
           <a:xfrm>
             <a:off x="457200" y="310896"/>
-            <a:ext cx="548640" cy="256032"/>
+            <a:ext cx="685800" cy="256032"/>
           </a:xfrm>
           <a:prstGeom prst="rect">
             <a:avLst/>
@@ -9879,7 +10135,7 @@
                 <a:ea typeface="Meiryo" pitchFamily="34" charset="-122"/>
                 <a:cs typeface="Meiryo" pitchFamily="34" charset="-120"/>
               </a:rPr>
-              <a:t>現状</a:t>
+              <a:t>使い方</a:t>
             </a:r>
             <a:endParaRPr lang="en-US" sz="1000" dirty="0"/>
           </a:p>
@@ -9918,7 +10174,7 @@
                 <a:ea typeface="Meiryo" pitchFamily="34" charset="-122"/>
                 <a:cs typeface="Meiryo" pitchFamily="34" charset="-120"/>
               </a:rPr>
-              <a:t>現在の到達点と、これから</a:t>
+              <a:t>終わった通話は「架電履歴」で見返せる</a:t>
             </a:r>
             <a:endParaRPr lang="en-US" sz="2400" dirty="0"/>
           </a:p>
@@ -9957,32 +10213,53 @@
                 <a:ea typeface="Meiryo" pitchFamily="34" charset="-122"/>
                 <a:cs typeface="Meiryo" pitchFamily="34" charset="-120"/>
               </a:rPr>
-              <a:t>15 / 16</a:t>
+              <a:t>15 / 17</a:t>
             </a:r>
             <a:endParaRPr lang="en-US" sz="900" dirty="0"/>
           </a:p>
         </p:txBody>
       </p:sp>
-      <p:sp>
-        <p:nvSpPr>
-          <p:cNvPr id="6" name="Shape 4"/>
+      <p:pic>
+        <p:nvPicPr>
+          <p:cNvPr id="6" name="Image 0" descr="preencoded.png">    </p:cNvPr>
+          <p:cNvPicPr>
+            <a:picLocks noChangeAspect="1"/>
+          </p:cNvPicPr>
+          <p:nvPr/>
+        </p:nvPicPr>
+        <p:blipFill>
+          <a:blip r:embed="rId1"/>
+          <a:stretch>
+            <a:fillRect/>
+          </a:stretch>
+        </p:blipFill>
+        <p:spPr>
+          <a:xfrm>
+            <a:off x="457200" y="1234440"/>
+            <a:ext cx="4754880" cy="1568450"/>
+          </a:xfrm>
+          <a:prstGeom prst="rect">
+            <a:avLst/>
+          </a:prstGeom>
+        </p:spPr>
+      </p:pic>
+      <p:sp>
+        <p:nvSpPr>
+          <p:cNvPr id="7" name="Shape 4"/>
           <p:cNvSpPr/>
           <p:nvPr/>
         </p:nvSpPr>
         <p:spPr>
           <a:xfrm>
             <a:off x="457200" y="1234440"/>
-            <a:ext cx="2834640" cy="548640"/>
-          </a:xfrm>
-          <a:prstGeom prst="chevron">
-            <a:avLst/>
-          </a:prstGeom>
-          <a:solidFill>
-            <a:srgbClr val="0B6E6E"/>
-          </a:solidFill>
-          <a:ln w="12700">
+            <a:ext cx="4754880" cy="1568450"/>
+          </a:xfrm>
+          <a:prstGeom prst="rect">
+            <a:avLst/>
+          </a:prstGeom>
+          <a:ln w="9525">
             <a:solidFill>
-              <a:srgbClr val="0B6E6E"/>
+              <a:srgbClr val="D5DDE0"/>
             </a:solidFill>
             <a:prstDash val="solid"/>
           </a:ln>
@@ -9990,63 +10267,24 @@
       </p:sp>
       <p:sp>
         <p:nvSpPr>
-          <p:cNvPr id="7" name="Text 5"/>
-          <p:cNvSpPr txBox="1"/>
-          <p:nvPr/>
-        </p:nvSpPr>
-        <p:spPr>
-          <a:xfrm>
-            <a:off x="777240" y="1234440"/>
-            <a:ext cx="2240280" cy="548640"/>
-          </a:xfrm>
-          <a:prstGeom prst="rect">
-            <a:avLst/>
-          </a:prstGeom>
-          <a:noFill/>
-          <a:ln/>
-        </p:spPr>
-        <p:txBody>
-          <a:bodyPr wrap="square" lIns="0" tIns="0" rIns="0" bIns="0" rtlCol="0" anchor="ctr"/>
-          <a:lstStyle/>
-          <a:p>
-            <a:pPr algn="ctr" indent="0" marL="0">
-              <a:buNone/>
-            </a:pPr>
-            <a:r>
-              <a:rPr lang="en-US" sz="1100" b="1" dirty="0">
-                <a:solidFill>
-                  <a:srgbClr val="FFFFFF"/>
-                </a:solidFill>
-                <a:latin typeface="Meiryo" pitchFamily="34" charset="0"/>
-                <a:ea typeface="Meiryo" pitchFamily="34" charset="-122"/>
-                <a:cs typeface="Meiryo" pitchFamily="34" charset="-120"/>
-              </a:rPr>
-              <a:t>いま：画面上のデモで体験</a:t>
-            </a:r>
-            <a:endParaRPr lang="en-US" sz="1100" dirty="0"/>
-          </a:p>
-        </p:txBody>
-      </p:sp>
-      <p:sp>
-        <p:nvSpPr>
-          <p:cNvPr id="8" name="Shape 6"/>
+          <p:cNvPr id="8" name="Shape 5"/>
           <p:cNvSpPr/>
           <p:nvPr/>
         </p:nvSpPr>
         <p:spPr>
           <a:xfrm>
-            <a:off x="3200400" y="1234440"/>
-            <a:ext cx="2834640" cy="548640"/>
-          </a:xfrm>
-          <a:prstGeom prst="chevron">
+            <a:off x="457200" y="2848610"/>
+            <a:ext cx="274320" cy="274320"/>
+          </a:xfrm>
+          <a:prstGeom prst="ellipse">
             <a:avLst/>
           </a:prstGeom>
           <a:solidFill>
-            <a:srgbClr val="E3F3F2"/>
+            <a:srgbClr val="D98A1E"/>
           </a:solidFill>
-          <a:ln w="12700">
+          <a:ln w="19050">
             <a:solidFill>
-              <a:srgbClr val="E3F3F2"/>
+              <a:srgbClr val="FFFFFF"/>
             </a:solidFill>
             <a:prstDash val="solid"/>
           </a:ln>
@@ -10054,14 +10292,14 @@
       </p:sp>
       <p:sp>
         <p:nvSpPr>
-          <p:cNvPr id="9" name="Text 7"/>
-          <p:cNvSpPr txBox="1"/>
-          <p:nvPr/>
-        </p:nvSpPr>
-        <p:spPr>
-          <a:xfrm>
-            <a:off x="3520440" y="1234440"/>
-            <a:ext cx="2240280" cy="548640"/>
+          <p:cNvPr id="9" name="Text 6"/>
+          <p:cNvSpPr txBox="1"/>
+          <p:nvPr/>
+        </p:nvSpPr>
+        <p:spPr>
+          <a:xfrm>
+            <a:off x="457200" y="2848610"/>
+            <a:ext cx="274320" cy="274320"/>
           </a:xfrm>
           <a:prstGeom prst="rect">
             <a:avLst/>
@@ -10079,13 +10317,13 @@
             <a:r>
               <a:rPr lang="en-US" sz="1100" b="1" dirty="0">
                 <a:solidFill>
-                  <a:srgbClr val="0B5563"/>
-                </a:solidFill>
-                <a:latin typeface="Meiryo" pitchFamily="34" charset="0"/>
-                <a:ea typeface="Meiryo" pitchFamily="34" charset="-122"/>
-                <a:cs typeface="Meiryo" pitchFamily="34" charset="-120"/>
-              </a:rPr>
-              <a:t>次：実際の電話回線につなぐ</a:t>
+                  <a:srgbClr val="FFFFFF"/>
+                </a:solidFill>
+                <a:latin typeface="Meiryo" pitchFamily="34" charset="0"/>
+                <a:ea typeface="Meiryo" pitchFamily="34" charset="-122"/>
+                <a:cs typeface="Meiryo" pitchFamily="34" charset="-120"/>
+              </a:rPr>
+              <a:t>1</a:t>
             </a:r>
             <a:endParaRPr lang="en-US" sz="1100" dirty="0"/>
           </a:p>
@@ -10093,82 +10331,57 @@
       </p:sp>
       <p:sp>
         <p:nvSpPr>
-          <p:cNvPr id="10" name="Shape 8"/>
+          <p:cNvPr id="10" name="Text 7"/>
+          <p:cNvSpPr txBox="1"/>
+          <p:nvPr/>
+        </p:nvSpPr>
+        <p:spPr>
+          <a:xfrm>
+            <a:off x="822960" y="2848610"/>
+            <a:ext cx="4389120" cy="274320"/>
+          </a:xfrm>
+          <a:prstGeom prst="rect">
+            <a:avLst/>
+          </a:prstGeom>
+          <a:noFill/>
+          <a:ln/>
+        </p:spPr>
+        <p:txBody>
+          <a:bodyPr wrap="square" lIns="0" tIns="0" rIns="0" bIns="0" rtlCol="0" anchor="ctr"/>
+          <a:lstStyle/>
+          <a:p>
+            <a:pPr indent="0" marL="0">
+              <a:buNone/>
+            </a:pPr>
+            <a:r>
+              <a:rPr lang="en-US" sz="1000" dirty="0">
+                <a:solidFill>
+                  <a:srgbClr val="1E2A30"/>
+                </a:solidFill>
+                <a:latin typeface="Meiryo" pitchFamily="34" charset="0"/>
+                <a:ea typeface="Meiryo" pitchFamily="34" charset="-122"/>
+                <a:cs typeface="Meiryo" pitchFamily="34" charset="-120"/>
+              </a:rPr>
+              <a:t>通話が終わると一覧に自動で追加（日時・企業名・結果・通話時間）</a:t>
+            </a:r>
+            <a:endParaRPr lang="en-US" sz="1000" dirty="0"/>
+          </a:p>
+        </p:txBody>
+      </p:sp>
+      <p:sp>
+        <p:nvSpPr>
+          <p:cNvPr id="11" name="Shape 8"/>
           <p:cNvSpPr/>
           <p:nvPr/>
         </p:nvSpPr>
         <p:spPr>
           <a:xfrm>
-            <a:off x="5943600" y="1234440"/>
-            <a:ext cx="2834640" cy="548640"/>
-          </a:xfrm>
-          <a:prstGeom prst="chevron">
-            <a:avLst/>
-          </a:prstGeom>
-          <a:solidFill>
-            <a:srgbClr val="E3F3F2"/>
-          </a:solidFill>
-          <a:ln w="12700">
-            <a:solidFill>
-              <a:srgbClr val="E3F3F2"/>
-            </a:solidFill>
-            <a:prstDash val="solid"/>
-          </a:ln>
-        </p:spPr>
-      </p:sp>
-      <p:sp>
-        <p:nvSpPr>
-          <p:cNvPr id="11" name="Text 9"/>
-          <p:cNvSpPr txBox="1"/>
-          <p:nvPr/>
-        </p:nvSpPr>
-        <p:spPr>
-          <a:xfrm>
-            <a:off x="6263640" y="1234440"/>
-            <a:ext cx="2240280" cy="548640"/>
-          </a:xfrm>
-          <a:prstGeom prst="rect">
-            <a:avLst/>
-          </a:prstGeom>
-          <a:noFill/>
-          <a:ln/>
-        </p:spPr>
-        <p:txBody>
-          <a:bodyPr wrap="square" lIns="0" tIns="0" rIns="0" bIns="0" rtlCol="0" anchor="ctr"/>
-          <a:lstStyle/>
-          <a:p>
-            <a:pPr algn="ctr" indent="0" marL="0">
-              <a:buNone/>
-            </a:pPr>
-            <a:r>
-              <a:rPr lang="en-US" sz="1100" b="1" dirty="0">
-                <a:solidFill>
-                  <a:srgbClr val="0B5563"/>
-                </a:solidFill>
-                <a:latin typeface="Meiryo" pitchFamily="34" charset="0"/>
-                <a:ea typeface="Meiryo" pitchFamily="34" charset="-122"/>
-                <a:cs typeface="Meiryo" pitchFamily="34" charset="-120"/>
-              </a:rPr>
-              <a:t>その先：対応できる会話を広げる</a:t>
-            </a:r>
-            <a:endParaRPr lang="en-US" sz="1100" dirty="0"/>
-          </a:p>
-        </p:txBody>
-      </p:sp>
-      <p:sp>
-        <p:nvSpPr>
-          <p:cNvPr id="12" name="Shape 10"/>
-          <p:cNvSpPr/>
-          <p:nvPr/>
-        </p:nvSpPr>
-        <p:spPr>
-          <a:xfrm>
-            <a:off x="457200" y="1965960"/>
-            <a:ext cx="4023360" cy="2697480"/>
+            <a:off x="457200" y="3260090"/>
+            <a:ext cx="4754880" cy="1385062"/>
           </a:xfrm>
           <a:prstGeom prst="roundRect">
             <a:avLst>
-              <a:gd name="adj" fmla="val 2712"/>
+              <a:gd name="adj" fmla="val 5281"/>
             </a:avLst>
           </a:prstGeom>
           <a:solidFill>
@@ -10182,111 +10395,9 @@
           </a:ln>
         </p:spPr>
       </p:sp>
-      <p:sp>
-        <p:nvSpPr>
-          <p:cNvPr id="13" name="Text 11"/>
-          <p:cNvSpPr txBox="1"/>
-          <p:nvPr/>
-        </p:nvSpPr>
-        <p:spPr>
-          <a:xfrm>
-            <a:off x="640080" y="2057400"/>
-            <a:ext cx="3657600" cy="320040"/>
-          </a:xfrm>
-          <a:prstGeom prst="rect">
-            <a:avLst/>
-          </a:prstGeom>
-          <a:noFill/>
-          <a:ln/>
-        </p:spPr>
-        <p:txBody>
-          <a:bodyPr wrap="square" lIns="0" tIns="0" rIns="0" bIns="0" rtlCol="0" anchor="t"/>
-          <a:lstStyle/>
-          <a:p>
-            <a:pPr indent="0" marL="0">
-              <a:buNone/>
-            </a:pPr>
-            <a:r>
-              <a:rPr lang="en-US" sz="1300" b="1" dirty="0">
-                <a:solidFill>
-                  <a:srgbClr val="0B6E6E"/>
-                </a:solidFill>
-                <a:latin typeface="Meiryo" pitchFamily="34" charset="0"/>
-                <a:ea typeface="Meiryo" pitchFamily="34" charset="-122"/>
-                <a:cs typeface="Meiryo" pitchFamily="34" charset="-120"/>
-              </a:rPr>
-              <a:t>いまできること（デモ版）</a:t>
-            </a:r>
-            <a:endParaRPr lang="en-US" sz="1300" dirty="0"/>
-          </a:p>
-        </p:txBody>
-      </p:sp>
       <p:pic>
         <p:nvPicPr>
-          <p:cNvPr id="14" name="Image 0" descr="preencoded.png">    </p:cNvPr>
-          <p:cNvPicPr>
-            <a:picLocks noChangeAspect="1"/>
-          </p:cNvPicPr>
-          <p:nvPr/>
-        </p:nvPicPr>
-        <p:blipFill>
-          <a:blip r:embed="rId1"/>
-          <a:stretch>
-            <a:fillRect/>
-          </a:stretch>
-        </p:blipFill>
-        <p:spPr>
-          <a:xfrm>
-            <a:off x="640080" y="2523744"/>
-            <a:ext cx="201168" cy="201168"/>
-          </a:xfrm>
-          <a:prstGeom prst="rect">
-            <a:avLst/>
-          </a:prstGeom>
-        </p:spPr>
-      </p:pic>
-      <p:sp>
-        <p:nvSpPr>
-          <p:cNvPr id="15" name="Text 12"/>
-          <p:cNvSpPr txBox="1"/>
-          <p:nvPr/>
-        </p:nvSpPr>
-        <p:spPr>
-          <a:xfrm>
-            <a:off x="960120" y="2468880"/>
-            <a:ext cx="3383280" cy="502920"/>
-          </a:xfrm>
-          <a:prstGeom prst="rect">
-            <a:avLst/>
-          </a:prstGeom>
-          <a:noFill/>
-          <a:ln/>
-        </p:spPr>
-        <p:txBody>
-          <a:bodyPr wrap="square" lIns="0" tIns="0" rIns="0" bIns="0" rtlCol="0" anchor="t"/>
-          <a:lstStyle/>
-          <a:p>
-            <a:pPr indent="0" marL="0">
-              <a:buNone/>
-            </a:pPr>
-            <a:r>
-              <a:rPr lang="en-US" sz="1050" dirty="0">
-                <a:solidFill>
-                  <a:srgbClr val="1E2A30"/>
-                </a:solidFill>
-                <a:latin typeface="Meiryo" pitchFamily="34" charset="0"/>
-                <a:ea typeface="Meiryo" pitchFamily="34" charset="-122"/>
-                <a:cs typeface="Meiryo" pitchFamily="34" charset="-120"/>
-              </a:rPr>
-              <a:t>パソコンの画面で、マイクに話しかけて AI と会話できる</a:t>
-            </a:r>
-            <a:endParaRPr lang="en-US" sz="1050" dirty="0"/>
-          </a:p>
-        </p:txBody>
-      </p:sp>
-      <p:pic>
-        <p:nvPicPr>
-          <p:cNvPr id="16" name="Image 1" descr="preencoded.png">    </p:cNvPr>
+          <p:cNvPr id="12" name="Image 1" descr="preencoded.png">    </p:cNvPr>
           <p:cNvPicPr>
             <a:picLocks noChangeAspect="1"/>
           </p:cNvPicPr>
@@ -10300,8 +10411,8 @@
         </p:blipFill>
         <p:spPr>
           <a:xfrm>
-            <a:off x="640080" y="3054096"/>
-            <a:ext cx="201168" cy="201168"/>
+            <a:off x="640080" y="3369818"/>
+            <a:ext cx="237744" cy="237744"/>
           </a:xfrm>
           <a:prstGeom prst="rect">
             <a:avLst/>
@@ -10310,30 +10421,30 @@
       </p:pic>
       <p:sp>
         <p:nvSpPr>
-          <p:cNvPr id="17" name="Text 13"/>
-          <p:cNvSpPr txBox="1"/>
-          <p:nvPr/>
-        </p:nvSpPr>
-        <p:spPr>
-          <a:xfrm>
-            <a:off x="960120" y="2999232"/>
-            <a:ext cx="3383280" cy="502920"/>
-          </a:xfrm>
-          <a:prstGeom prst="rect">
-            <a:avLst/>
-          </a:prstGeom>
-          <a:noFill/>
-          <a:ln/>
-        </p:spPr>
-        <p:txBody>
-          <a:bodyPr wrap="square" lIns="0" tIns="0" rIns="0" bIns="0" rtlCol="0" anchor="t"/>
+          <p:cNvPr id="13" name="Text 9"/>
+          <p:cNvSpPr txBox="1"/>
+          <p:nvPr/>
+        </p:nvSpPr>
+        <p:spPr>
+          <a:xfrm>
+            <a:off x="969264" y="3324098"/>
+            <a:ext cx="4114800" cy="329184"/>
+          </a:xfrm>
+          <a:prstGeom prst="rect">
+            <a:avLst/>
+          </a:prstGeom>
+          <a:noFill/>
+          <a:ln/>
+        </p:spPr>
+        <p:txBody>
+          <a:bodyPr wrap="square" lIns="0" tIns="0" rIns="0" bIns="0" rtlCol="0" anchor="ctr"/>
           <a:lstStyle/>
           <a:p>
             <a:pPr indent="0" marL="0">
               <a:buNone/>
             </a:pPr>
             <a:r>
-              <a:rPr lang="en-US" sz="1050" dirty="0">
+              <a:rPr lang="en-US" sz="1200" b="1" dirty="0">
                 <a:solidFill>
                   <a:srgbClr val="1E2A30"/>
                 </a:solidFill>
@@ -10341,15 +10452,132 @@
                 <a:ea typeface="Meiryo" pitchFamily="34" charset="-122"/>
                 <a:cs typeface="Meiryo" pitchFamily="34" charset="-120"/>
               </a:rPr>
-              <a:t>台本と判断ルールにそって、毎回同じ品質で応答する</a:t>
-            </a:r>
-            <a:endParaRPr lang="en-US" sz="1050" dirty="0"/>
+              <a:t>保存先は「このパソコンのブラウザの中」</a:t>
+            </a:r>
+            <a:endParaRPr lang="en-US" sz="1200" dirty="0"/>
+          </a:p>
+        </p:txBody>
+      </p:sp>
+      <p:sp>
+        <p:nvSpPr>
+          <p:cNvPr id="14" name="Text 10"/>
+          <p:cNvSpPr txBox="1"/>
+          <p:nvPr/>
+        </p:nvSpPr>
+        <p:spPr>
+          <a:xfrm>
+            <a:off x="658368" y="3689858"/>
+            <a:ext cx="4480560" cy="237744"/>
+          </a:xfrm>
+          <a:prstGeom prst="rect">
+            <a:avLst/>
+          </a:prstGeom>
+          <a:noFill/>
+          <a:ln/>
+        </p:spPr>
+        <p:txBody>
+          <a:bodyPr wrap="square" lIns="0" tIns="0" rIns="0" bIns="0" rtlCol="0" anchor="ctr"/>
+          <a:lstStyle/>
+          <a:p>
+            <a:pPr indent="0" marL="0">
+              <a:buNone/>
+            </a:pPr>
+            <a:r>
+              <a:rPr lang="en-US" sz="1000" dirty="0">
+                <a:solidFill>
+                  <a:srgbClr val="1E2A30"/>
+                </a:solidFill>
+                <a:latin typeface="Meiryo" pitchFamily="34" charset="0"/>
+                <a:ea typeface="Meiryo" pitchFamily="34" charset="-122"/>
+                <a:cs typeface="Meiryo" pitchFamily="34" charset="-120"/>
+              </a:rPr>
+              <a:t>・サーバーには送りません。ページを開き直しても消えません</a:t>
+            </a:r>
+            <a:endParaRPr lang="en-US" sz="1000" dirty="0"/>
+          </a:p>
+        </p:txBody>
+      </p:sp>
+      <p:sp>
+        <p:nvSpPr>
+          <p:cNvPr id="15" name="Text 11"/>
+          <p:cNvSpPr txBox="1"/>
+          <p:nvPr/>
+        </p:nvSpPr>
+        <p:spPr>
+          <a:xfrm>
+            <a:off x="658368" y="3945890"/>
+            <a:ext cx="4480560" cy="237744"/>
+          </a:xfrm>
+          <a:prstGeom prst="rect">
+            <a:avLst/>
+          </a:prstGeom>
+          <a:noFill/>
+          <a:ln/>
+        </p:spPr>
+        <p:txBody>
+          <a:bodyPr wrap="square" lIns="0" tIns="0" rIns="0" bIns="0" rtlCol="0" anchor="ctr"/>
+          <a:lstStyle/>
+          <a:p>
+            <a:pPr indent="0" marL="0">
+              <a:buNone/>
+            </a:pPr>
+            <a:r>
+              <a:rPr lang="en-US" sz="1000" dirty="0">
+                <a:solidFill>
+                  <a:srgbClr val="1E2A30"/>
+                </a:solidFill>
+                <a:latin typeface="Meiryo" pitchFamily="34" charset="0"/>
+                <a:ea typeface="Meiryo" pitchFamily="34" charset="-122"/>
+                <a:cs typeface="Meiryo" pitchFamily="34" charset="-120"/>
+              </a:rPr>
+              <a:t>・別のパソコンやブラウザとは共有されません</a:t>
+            </a:r>
+            <a:endParaRPr lang="en-US" sz="1000" dirty="0"/>
+          </a:p>
+        </p:txBody>
+      </p:sp>
+      <p:sp>
+        <p:nvSpPr>
+          <p:cNvPr id="16" name="Text 12"/>
+          <p:cNvSpPr txBox="1"/>
+          <p:nvPr/>
+        </p:nvSpPr>
+        <p:spPr>
+          <a:xfrm>
+            <a:off x="658368" y="4201922"/>
+            <a:ext cx="4480560" cy="237744"/>
+          </a:xfrm>
+          <a:prstGeom prst="rect">
+            <a:avLst/>
+          </a:prstGeom>
+          <a:noFill/>
+          <a:ln/>
+        </p:spPr>
+        <p:txBody>
+          <a:bodyPr wrap="square" lIns="0" tIns="0" rIns="0" bIns="0" rtlCol="0" anchor="ctr"/>
+          <a:lstStyle/>
+          <a:p>
+            <a:pPr indent="0" marL="0">
+              <a:buNone/>
+            </a:pPr>
+            <a:r>
+              <a:rPr lang="en-US" sz="1000" dirty="0">
+                <a:solidFill>
+                  <a:srgbClr val="1E2A30"/>
+                </a:solidFill>
+                <a:latin typeface="Meiryo" pitchFamily="34" charset="0"/>
+                <a:ea typeface="Meiryo" pitchFamily="34" charset="-122"/>
+                <a:cs typeface="Meiryo" pitchFamily="34" charset="-120"/>
+              </a:rPr>
+              <a:t>・最大200件。途中で「リセット」した通話は記録しません</a:t>
+            </a:r>
+            <a:endParaRPr lang="en-US" sz="1000" dirty="0"/>
           </a:p>
         </p:txBody>
       </p:sp>
       <p:pic>
         <p:nvPicPr>
-          <p:cNvPr id="18" name="Image 2" descr="preencoded.png">    </p:cNvPr>
+          <p:cNvPr id="17" name="Image 2" descr="preencoded.png">    </p:cNvPr>
           <p:cNvPicPr>
             <a:picLocks noChangeAspect="1"/>
           </p:cNvPicPr>
@@ -10363,8 +10591,8 @@
         </p:blipFill>
         <p:spPr>
           <a:xfrm>
-            <a:off x="640080" y="3584448"/>
-            <a:ext cx="201168" cy="201168"/>
+            <a:off x="5532120" y="1234440"/>
+            <a:ext cx="3154680" cy="3050680"/>
           </a:xfrm>
           <a:prstGeom prst="rect">
             <a:avLst/>
@@ -10373,128 +10601,21 @@
       </p:pic>
       <p:sp>
         <p:nvSpPr>
-          <p:cNvPr id="19" name="Text 14"/>
-          <p:cNvSpPr txBox="1"/>
-          <p:nvPr/>
-        </p:nvSpPr>
-        <p:spPr>
-          <a:xfrm>
-            <a:off x="960120" y="3529584"/>
-            <a:ext cx="3383280" cy="502920"/>
-          </a:xfrm>
-          <a:prstGeom prst="rect">
-            <a:avLst/>
-          </a:prstGeom>
-          <a:noFill/>
-          <a:ln/>
-        </p:spPr>
-        <p:txBody>
-          <a:bodyPr wrap="square" lIns="0" tIns="0" rIns="0" bIns="0" rtlCol="0" anchor="t"/>
-          <a:lstStyle/>
-          <a:p>
-            <a:pPr indent="0" marL="0">
-              <a:buNone/>
-            </a:pPr>
-            <a:r>
-              <a:rPr lang="en-US" sz="1050" dirty="0">
-                <a:solidFill>
-                  <a:srgbClr val="1E2A30"/>
-                </a:solidFill>
-                <a:latin typeface="Meiryo" pitchFamily="34" charset="0"/>
-                <a:ea typeface="Meiryo" pitchFamily="34" charset="-122"/>
-                <a:cs typeface="Meiryo" pitchFamily="34" charset="-120"/>
-              </a:rPr>
-              <a:t>判断の理由と聞き取り状況が、その場で画面に見える</a:t>
-            </a:r>
-            <a:endParaRPr lang="en-US" sz="1050" dirty="0"/>
-          </a:p>
-        </p:txBody>
-      </p:sp>
-      <p:pic>
-        <p:nvPicPr>
-          <p:cNvPr id="20" name="Image 3" descr="preencoded.png">    </p:cNvPr>
-          <p:cNvPicPr>
-            <a:picLocks noChangeAspect="1"/>
-          </p:cNvPicPr>
-          <p:nvPr/>
-        </p:nvPicPr>
-        <p:blipFill>
-          <a:blip r:embed="rId4"/>
-          <a:stretch>
-            <a:fillRect/>
-          </a:stretch>
-        </p:blipFill>
-        <p:spPr>
-          <a:xfrm>
-            <a:off x="640080" y="4114800"/>
-            <a:ext cx="201168" cy="201168"/>
-          </a:xfrm>
-          <a:prstGeom prst="rect">
-            <a:avLst/>
-          </a:prstGeom>
-        </p:spPr>
-      </p:pic>
-      <p:sp>
-        <p:nvSpPr>
-          <p:cNvPr id="21" name="Text 15"/>
-          <p:cNvSpPr txBox="1"/>
-          <p:nvPr/>
-        </p:nvSpPr>
-        <p:spPr>
-          <a:xfrm>
-            <a:off x="960120" y="4059936"/>
-            <a:ext cx="3383280" cy="502920"/>
-          </a:xfrm>
-          <a:prstGeom prst="rect">
-            <a:avLst/>
-          </a:prstGeom>
-          <a:noFill/>
-          <a:ln/>
-        </p:spPr>
-        <p:txBody>
-          <a:bodyPr wrap="square" lIns="0" tIns="0" rIns="0" bIns="0" rtlCol="0" anchor="t"/>
-          <a:lstStyle/>
-          <a:p>
-            <a:pPr indent="0" marL="0">
-              <a:buNone/>
-            </a:pPr>
-            <a:r>
-              <a:rPr lang="en-US" sz="1050" dirty="0">
-                <a:solidFill>
-                  <a:srgbClr val="1E2A30"/>
-                </a:solidFill>
-                <a:latin typeface="Meiryo" pitchFamily="34" charset="0"/>
-                <a:ea typeface="Meiryo" pitchFamily="34" charset="-122"/>
-                <a:cs typeface="Meiryo" pitchFamily="34" charset="-120"/>
-              </a:rPr>
-              <a:t>用意した音声で話す（メールアドレスなど一部は機械の読み上げ）</a:t>
-            </a:r>
-            <a:endParaRPr lang="en-US" sz="1050" dirty="0"/>
-          </a:p>
-        </p:txBody>
-      </p:sp>
-      <p:sp>
-        <p:nvSpPr>
-          <p:cNvPr id="22" name="Shape 16"/>
+          <p:cNvPr id="18" name="Shape 13"/>
           <p:cNvSpPr/>
           <p:nvPr/>
         </p:nvSpPr>
         <p:spPr>
           <a:xfrm>
-            <a:off x="4663440" y="1965960"/>
-            <a:ext cx="4023360" cy="2697480"/>
-          </a:xfrm>
-          <a:prstGeom prst="roundRect">
-            <a:avLst>
-              <a:gd name="adj" fmla="val 2712"/>
-            </a:avLst>
-          </a:prstGeom>
-          <a:solidFill>
-            <a:srgbClr val="FDF1DC"/>
-          </a:solidFill>
+            <a:off x="5532120" y="1234440"/>
+            <a:ext cx="3154680" cy="3050680"/>
+          </a:xfrm>
+          <a:prstGeom prst="rect">
+            <a:avLst/>
+          </a:prstGeom>
           <a:ln w="9525">
             <a:solidFill>
-              <a:srgbClr val="FDF1DC"/>
+              <a:srgbClr val="D5DDE0"/>
             </a:solidFill>
             <a:prstDash val="solid"/>
           </a:ln>
@@ -10502,93 +10623,94 @@
       </p:sp>
       <p:sp>
         <p:nvSpPr>
-          <p:cNvPr id="23" name="Text 17"/>
-          <p:cNvSpPr txBox="1"/>
-          <p:nvPr/>
-        </p:nvSpPr>
-        <p:spPr>
-          <a:xfrm>
-            <a:off x="4846320" y="2057400"/>
-            <a:ext cx="3657600" cy="320040"/>
-          </a:xfrm>
-          <a:prstGeom prst="rect">
-            <a:avLst/>
-          </a:prstGeom>
-          <a:noFill/>
-          <a:ln/>
-        </p:spPr>
-        <p:txBody>
-          <a:bodyPr wrap="square" lIns="0" tIns="0" rIns="0" bIns="0" rtlCol="0" anchor="t"/>
+          <p:cNvPr id="19" name="Shape 14"/>
+          <p:cNvSpPr/>
+          <p:nvPr/>
+        </p:nvSpPr>
+        <p:spPr>
+          <a:xfrm>
+            <a:off x="5532120" y="4330840"/>
+            <a:ext cx="274320" cy="274320"/>
+          </a:xfrm>
+          <a:prstGeom prst="ellipse">
+            <a:avLst/>
+          </a:prstGeom>
+          <a:solidFill>
+            <a:srgbClr val="D98A1E"/>
+          </a:solidFill>
+          <a:ln w="19050">
+            <a:solidFill>
+              <a:srgbClr val="FFFFFF"/>
+            </a:solidFill>
+            <a:prstDash val="solid"/>
+          </a:ln>
+        </p:spPr>
+      </p:sp>
+      <p:sp>
+        <p:nvSpPr>
+          <p:cNvPr id="20" name="Text 15"/>
+          <p:cNvSpPr txBox="1"/>
+          <p:nvPr/>
+        </p:nvSpPr>
+        <p:spPr>
+          <a:xfrm>
+            <a:off x="5532120" y="4330840"/>
+            <a:ext cx="274320" cy="274320"/>
+          </a:xfrm>
+          <a:prstGeom prst="rect">
+            <a:avLst/>
+          </a:prstGeom>
+          <a:noFill/>
+          <a:ln/>
+        </p:spPr>
+        <p:txBody>
+          <a:bodyPr wrap="square" lIns="0" tIns="0" rIns="0" bIns="0" rtlCol="0" anchor="ctr"/>
+          <a:lstStyle/>
+          <a:p>
+            <a:pPr algn="ctr" indent="0" marL="0">
+              <a:buNone/>
+            </a:pPr>
+            <a:r>
+              <a:rPr lang="en-US" sz="1100" b="1" dirty="0">
+                <a:solidFill>
+                  <a:srgbClr val="FFFFFF"/>
+                </a:solidFill>
+                <a:latin typeface="Meiryo" pitchFamily="34" charset="0"/>
+                <a:ea typeface="Meiryo" pitchFamily="34" charset="-122"/>
+                <a:cs typeface="Meiryo" pitchFamily="34" charset="-120"/>
+              </a:rPr>
+              <a:t>2</a:t>
+            </a:r>
+            <a:endParaRPr lang="en-US" sz="1100" dirty="0"/>
+          </a:p>
+        </p:txBody>
+      </p:sp>
+      <p:sp>
+        <p:nvSpPr>
+          <p:cNvPr id="21" name="Text 16"/>
+          <p:cNvSpPr txBox="1"/>
+          <p:nvPr/>
+        </p:nvSpPr>
+        <p:spPr>
+          <a:xfrm>
+            <a:off x="5897880" y="4330840"/>
+            <a:ext cx="2788920" cy="274320"/>
+          </a:xfrm>
+          <a:prstGeom prst="rect">
+            <a:avLst/>
+          </a:prstGeom>
+          <a:noFill/>
+          <a:ln/>
+        </p:spPr>
+        <p:txBody>
+          <a:bodyPr wrap="square" lIns="0" tIns="0" rIns="0" bIns="0" rtlCol="0" anchor="ctr"/>
           <a:lstStyle/>
           <a:p>
             <a:pPr indent="0" marL="0">
               <a:buNone/>
             </a:pPr>
             <a:r>
-              <a:rPr lang="en-US" sz="1300" b="1" dirty="0">
-                <a:solidFill>
-                  <a:srgbClr val="8A5A00"/>
-                </a:solidFill>
-                <a:latin typeface="Meiryo" pitchFamily="34" charset="0"/>
-                <a:ea typeface="Meiryo" pitchFamily="34" charset="-122"/>
-                <a:cs typeface="Meiryo" pitchFamily="34" charset="-120"/>
-              </a:rPr>
-              <a:t>これから取り組むこと</a:t>
-            </a:r>
-            <a:endParaRPr lang="en-US" sz="1300" dirty="0"/>
-          </a:p>
-        </p:txBody>
-      </p:sp>
-      <p:pic>
-        <p:nvPicPr>
-          <p:cNvPr id="24" name="Image 4" descr="preencoded.png">    </p:cNvPr>
-          <p:cNvPicPr>
-            <a:picLocks noChangeAspect="1"/>
-          </p:cNvPicPr>
-          <p:nvPr/>
-        </p:nvPicPr>
-        <p:blipFill>
-          <a:blip r:embed="rId5"/>
-          <a:stretch>
-            <a:fillRect/>
-          </a:stretch>
-        </p:blipFill>
-        <p:spPr>
-          <a:xfrm>
-            <a:off x="4846320" y="2523744"/>
-            <a:ext cx="201168" cy="201168"/>
-          </a:xfrm>
-          <a:prstGeom prst="rect">
-            <a:avLst/>
-          </a:prstGeom>
-        </p:spPr>
-      </p:pic>
-      <p:sp>
-        <p:nvSpPr>
-          <p:cNvPr id="25" name="Text 18"/>
-          <p:cNvSpPr txBox="1"/>
-          <p:nvPr/>
-        </p:nvSpPr>
-        <p:spPr>
-          <a:xfrm>
-            <a:off x="5166360" y="2468880"/>
-            <a:ext cx="3383280" cy="502920"/>
-          </a:xfrm>
-          <a:prstGeom prst="rect">
-            <a:avLst/>
-          </a:prstGeom>
-          <a:noFill/>
-          <a:ln/>
-        </p:spPr>
-        <p:txBody>
-          <a:bodyPr wrap="square" lIns="0" tIns="0" rIns="0" bIns="0" rtlCol="0" anchor="t"/>
-          <a:lstStyle/>
-          <a:p>
-            <a:pPr indent="0" marL="0">
-              <a:buNone/>
-            </a:pPr>
-            <a:r>
-              <a:rPr lang="en-US" sz="1050" dirty="0">
+              <a:rPr lang="en-US" sz="950" dirty="0">
                 <a:solidFill>
                   <a:srgbClr val="1E2A30"/>
                 </a:solidFill>
@@ -10596,198 +10718,9 @@
                 <a:ea typeface="Meiryo" pitchFamily="34" charset="-122"/>
                 <a:cs typeface="Meiryo" pitchFamily="34" charset="-120"/>
               </a:rPr>
-              <a:t>実際の電話回線とつないで、本物の電話で試す</a:t>
-            </a:r>
-            <a:endParaRPr lang="en-US" sz="1050" dirty="0"/>
-          </a:p>
-        </p:txBody>
-      </p:sp>
-      <p:pic>
-        <p:nvPicPr>
-          <p:cNvPr id="26" name="Image 5" descr="preencoded.png">    </p:cNvPr>
-          <p:cNvPicPr>
-            <a:picLocks noChangeAspect="1"/>
-          </p:cNvPicPr>
-          <p:nvPr/>
-        </p:nvPicPr>
-        <p:blipFill>
-          <a:blip r:embed="rId6"/>
-          <a:stretch>
-            <a:fillRect/>
-          </a:stretch>
-        </p:blipFill>
-        <p:spPr>
-          <a:xfrm>
-            <a:off x="4846320" y="3054096"/>
-            <a:ext cx="201168" cy="201168"/>
-          </a:xfrm>
-          <a:prstGeom prst="rect">
-            <a:avLst/>
-          </a:prstGeom>
-        </p:spPr>
-      </p:pic>
-      <p:sp>
-        <p:nvSpPr>
-          <p:cNvPr id="27" name="Text 19"/>
-          <p:cNvSpPr txBox="1"/>
-          <p:nvPr/>
-        </p:nvSpPr>
-        <p:spPr>
-          <a:xfrm>
-            <a:off x="5166360" y="2999232"/>
-            <a:ext cx="3383280" cy="502920"/>
-          </a:xfrm>
-          <a:prstGeom prst="rect">
-            <a:avLst/>
-          </a:prstGeom>
-          <a:noFill/>
-          <a:ln/>
-        </p:spPr>
-        <p:txBody>
-          <a:bodyPr wrap="square" lIns="0" tIns="0" rIns="0" bIns="0" rtlCol="0" anchor="t"/>
-          <a:lstStyle/>
-          <a:p>
-            <a:pPr indent="0" marL="0">
-              <a:buNone/>
-            </a:pPr>
-            <a:r>
-              <a:rPr lang="en-US" sz="1050" dirty="0">
-                <a:solidFill>
-                  <a:srgbClr val="1E2A30"/>
-                </a:solidFill>
-                <a:latin typeface="Meiryo" pitchFamily="34" charset="0"/>
-                <a:ea typeface="Meiryo" pitchFamily="34" charset="-122"/>
-                <a:cs typeface="Meiryo" pitchFamily="34" charset="-120"/>
-              </a:rPr>
-              <a:t>想定外の言い回しへの対応を強化（生成AIを組み込む準備は済み、品質の確認はこれから）</a:t>
-            </a:r>
-            <a:endParaRPr lang="en-US" sz="1050" dirty="0"/>
-          </a:p>
-        </p:txBody>
-      </p:sp>
-      <p:pic>
-        <p:nvPicPr>
-          <p:cNvPr id="28" name="Image 6" descr="preencoded.png">    </p:cNvPr>
-          <p:cNvPicPr>
-            <a:picLocks noChangeAspect="1"/>
-          </p:cNvPicPr>
-          <p:nvPr/>
-        </p:nvPicPr>
-        <p:blipFill>
-          <a:blip r:embed="rId7"/>
-          <a:stretch>
-            <a:fillRect/>
-          </a:stretch>
-        </p:blipFill>
-        <p:spPr>
-          <a:xfrm>
-            <a:off x="4846320" y="3584448"/>
-            <a:ext cx="201168" cy="201168"/>
-          </a:xfrm>
-          <a:prstGeom prst="rect">
-            <a:avLst/>
-          </a:prstGeom>
-        </p:spPr>
-      </p:pic>
-      <p:sp>
-        <p:nvSpPr>
-          <p:cNvPr id="29" name="Text 20"/>
-          <p:cNvSpPr txBox="1"/>
-          <p:nvPr/>
-        </p:nvSpPr>
-        <p:spPr>
-          <a:xfrm>
-            <a:off x="5166360" y="3529584"/>
-            <a:ext cx="3383280" cy="502920"/>
-          </a:xfrm>
-          <a:prstGeom prst="rect">
-            <a:avLst/>
-          </a:prstGeom>
-          <a:noFill/>
-          <a:ln/>
-        </p:spPr>
-        <p:txBody>
-          <a:bodyPr wrap="square" lIns="0" tIns="0" rIns="0" bIns="0" rtlCol="0" anchor="t"/>
-          <a:lstStyle/>
-          <a:p>
-            <a:pPr indent="0" marL="0">
-              <a:buNone/>
-            </a:pPr>
-            <a:r>
-              <a:rPr lang="en-US" sz="1050" dirty="0">
-                <a:solidFill>
-                  <a:srgbClr val="1E2A30"/>
-                </a:solidFill>
-                <a:latin typeface="Meiryo" pitchFamily="34" charset="0"/>
-                <a:ea typeface="Meiryo" pitchFamily="34" charset="-122"/>
-                <a:cs typeface="Meiryo" pitchFamily="34" charset="-120"/>
-              </a:rPr>
-              <a:t>かけ直し・日程変更の電話</a:t>
-            </a:r>
-            <a:endParaRPr lang="en-US" sz="1050" dirty="0"/>
-          </a:p>
-        </p:txBody>
-      </p:sp>
-      <p:pic>
-        <p:nvPicPr>
-          <p:cNvPr id="30" name="Image 7" descr="preencoded.png">    </p:cNvPr>
-          <p:cNvPicPr>
-            <a:picLocks noChangeAspect="1"/>
-          </p:cNvPicPr>
-          <p:nvPr/>
-        </p:nvPicPr>
-        <p:blipFill>
-          <a:blip r:embed="rId8"/>
-          <a:stretch>
-            <a:fillRect/>
-          </a:stretch>
-        </p:blipFill>
-        <p:spPr>
-          <a:xfrm>
-            <a:off x="4846320" y="4114800"/>
-            <a:ext cx="201168" cy="201168"/>
-          </a:xfrm>
-          <a:prstGeom prst="rect">
-            <a:avLst/>
-          </a:prstGeom>
-        </p:spPr>
-      </p:pic>
-      <p:sp>
-        <p:nvSpPr>
-          <p:cNvPr id="31" name="Text 21"/>
-          <p:cNvSpPr txBox="1"/>
-          <p:nvPr/>
-        </p:nvSpPr>
-        <p:spPr>
-          <a:xfrm>
-            <a:off x="5166360" y="4059936"/>
-            <a:ext cx="3383280" cy="502920"/>
-          </a:xfrm>
-          <a:prstGeom prst="rect">
-            <a:avLst/>
-          </a:prstGeom>
-          <a:noFill/>
-          <a:ln/>
-        </p:spPr>
-        <p:txBody>
-          <a:bodyPr wrap="square" lIns="0" tIns="0" rIns="0" bIns="0" rtlCol="0" anchor="t"/>
-          <a:lstStyle/>
-          <a:p>
-            <a:pPr indent="0" marL="0">
-              <a:buNone/>
-            </a:pPr>
-            <a:r>
-              <a:rPr lang="en-US" sz="1050" dirty="0">
-                <a:solidFill>
-                  <a:srgbClr val="1E2A30"/>
-                </a:solidFill>
-                <a:latin typeface="Meiryo" pitchFamily="34" charset="0"/>
-                <a:ea typeface="Meiryo" pitchFamily="34" charset="-122"/>
-                <a:cs typeface="Meiryo" pitchFamily="34" charset="-120"/>
-              </a:rPr>
-              <a:t>資料送付後のフォロー、強い受付ブロックへの対応</a:t>
-            </a:r>
-            <a:endParaRPr lang="en-US" sz="1050" dirty="0"/>
+              <a:t>行を押すと詳細：判定・聞き取り・全文ログ</a:t>
+            </a:r>
+            <a:endParaRPr lang="en-US" sz="950" dirty="0"/>
           </a:p>
         </p:txBody>
       </p:sp>
@@ -10802,6 +10735,1010 @@
 <file path=ppt/slides/slide16.xml><?xml version="1.0" encoding="utf-8"?>
 <p:sld xmlns:a="http://schemas.openxmlformats.org/drawingml/2006/main" xmlns:r="http://schemas.openxmlformats.org/officeDocument/2006/relationships" xmlns:p="http://schemas.openxmlformats.org/presentationml/2006/main">
   <p:cSld name="Slide 16">
+    <p:bg>
+      <p:bgPr>
+        <a:solidFill>
+          <a:srgbClr val="FFFFFF"/>
+        </a:solidFill>
+      </p:bgPr>
+    </p:bg>
+    <p:spTree>
+      <p:nvGrpSpPr>
+        <p:cNvPr id="1" name=""/>
+        <p:cNvGrpSpPr/>
+        <p:nvPr/>
+      </p:nvGrpSpPr>
+      <p:grpSpPr>
+        <a:xfrm>
+          <a:off x="0" y="0"/>
+          <a:ext cx="0" cy="0"/>
+          <a:chOff x="0" y="0"/>
+          <a:chExt cx="0" cy="0"/>
+        </a:xfrm>
+      </p:grpSpPr>
+      <p:sp>
+        <p:nvSpPr>
+          <p:cNvPr id="2" name="Shape 0"/>
+          <p:cNvSpPr/>
+          <p:nvPr/>
+        </p:nvSpPr>
+        <p:spPr>
+          <a:xfrm>
+            <a:off x="457200" y="310896"/>
+            <a:ext cx="548640" cy="256032"/>
+          </a:xfrm>
+          <a:prstGeom prst="roundRect">
+            <a:avLst>
+              <a:gd name="adj" fmla="val 50000"/>
+            </a:avLst>
+          </a:prstGeom>
+          <a:solidFill>
+            <a:srgbClr val="E3F3F2"/>
+          </a:solidFill>
+          <a:ln w="9525">
+            <a:solidFill>
+              <a:srgbClr val="E3F3F2"/>
+            </a:solidFill>
+            <a:prstDash val="solid"/>
+          </a:ln>
+        </p:spPr>
+      </p:sp>
+      <p:sp>
+        <p:nvSpPr>
+          <p:cNvPr id="3" name="Text 1"/>
+          <p:cNvSpPr txBox="1"/>
+          <p:nvPr/>
+        </p:nvSpPr>
+        <p:spPr>
+          <a:xfrm>
+            <a:off x="457200" y="310896"/>
+            <a:ext cx="548640" cy="256032"/>
+          </a:xfrm>
+          <a:prstGeom prst="rect">
+            <a:avLst/>
+          </a:prstGeom>
+          <a:noFill/>
+          <a:ln/>
+        </p:spPr>
+        <p:txBody>
+          <a:bodyPr wrap="square" lIns="0" tIns="0" rIns="0" bIns="0" rtlCol="0" anchor="ctr"/>
+          <a:lstStyle/>
+          <a:p>
+            <a:pPr algn="ctr" indent="0" marL="0">
+              <a:buNone/>
+            </a:pPr>
+            <a:r>
+              <a:rPr lang="en-US" sz="1000" b="1" dirty="0">
+                <a:solidFill>
+                  <a:srgbClr val="0B6E6E"/>
+                </a:solidFill>
+                <a:latin typeface="Meiryo" pitchFamily="34" charset="0"/>
+                <a:ea typeface="Meiryo" pitchFamily="34" charset="-122"/>
+                <a:cs typeface="Meiryo" pitchFamily="34" charset="-120"/>
+              </a:rPr>
+              <a:t>現状</a:t>
+            </a:r>
+            <a:endParaRPr lang="en-US" sz="1000" dirty="0"/>
+          </a:p>
+        </p:txBody>
+      </p:sp>
+      <p:sp>
+        <p:nvSpPr>
+          <p:cNvPr id="4" name="Text 2"/>
+          <p:cNvSpPr txBox="1"/>
+          <p:nvPr/>
+        </p:nvSpPr>
+        <p:spPr>
+          <a:xfrm>
+            <a:off x="457200" y="603504"/>
+            <a:ext cx="8229600" cy="502920"/>
+          </a:xfrm>
+          <a:prstGeom prst="rect">
+            <a:avLst/>
+          </a:prstGeom>
+          <a:noFill/>
+          <a:ln/>
+        </p:spPr>
+        <p:txBody>
+          <a:bodyPr wrap="square" lIns="0" tIns="0" rIns="0" bIns="0" rtlCol="0" anchor="ctr"/>
+          <a:lstStyle/>
+          <a:p>
+            <a:pPr indent="0" marL="0">
+              <a:buNone/>
+            </a:pPr>
+            <a:r>
+              <a:rPr lang="en-US" sz="2400" b="1" dirty="0">
+                <a:solidFill>
+                  <a:srgbClr val="1E2A30"/>
+                </a:solidFill>
+                <a:latin typeface="Meiryo" pitchFamily="34" charset="0"/>
+                <a:ea typeface="Meiryo" pitchFamily="34" charset="-122"/>
+                <a:cs typeface="Meiryo" pitchFamily="34" charset="-120"/>
+              </a:rPr>
+              <a:t>現在の到達点と、これから</a:t>
+            </a:r>
+            <a:endParaRPr lang="en-US" sz="2400" dirty="0"/>
+          </a:p>
+        </p:txBody>
+      </p:sp>
+      <p:sp>
+        <p:nvSpPr>
+          <p:cNvPr id="5" name="Text 3"/>
+          <p:cNvSpPr txBox="1"/>
+          <p:nvPr/>
+        </p:nvSpPr>
+        <p:spPr>
+          <a:xfrm>
+            <a:off x="7955280" y="4773168"/>
+            <a:ext cx="731520" cy="228600"/>
+          </a:xfrm>
+          <a:prstGeom prst="rect">
+            <a:avLst/>
+          </a:prstGeom>
+          <a:noFill/>
+          <a:ln/>
+        </p:spPr>
+        <p:txBody>
+          <a:bodyPr wrap="square" lIns="0" tIns="0" rIns="0" bIns="0" rtlCol="0" anchor="t"/>
+          <a:lstStyle/>
+          <a:p>
+            <a:pPr algn="r" indent="0" marL="0">
+              <a:buNone/>
+            </a:pPr>
+            <a:r>
+              <a:rPr lang="en-US" sz="900" dirty="0">
+                <a:solidFill>
+                  <a:srgbClr val="5B6870"/>
+                </a:solidFill>
+                <a:latin typeface="Meiryo" pitchFamily="34" charset="0"/>
+                <a:ea typeface="Meiryo" pitchFamily="34" charset="-122"/>
+                <a:cs typeface="Meiryo" pitchFamily="34" charset="-120"/>
+              </a:rPr>
+              <a:t>16 / 17</a:t>
+            </a:r>
+            <a:endParaRPr lang="en-US" sz="900" dirty="0"/>
+          </a:p>
+        </p:txBody>
+      </p:sp>
+      <p:sp>
+        <p:nvSpPr>
+          <p:cNvPr id="6" name="Shape 4"/>
+          <p:cNvSpPr/>
+          <p:nvPr/>
+        </p:nvSpPr>
+        <p:spPr>
+          <a:xfrm>
+            <a:off x="457200" y="1234440"/>
+            <a:ext cx="2834640" cy="548640"/>
+          </a:xfrm>
+          <a:prstGeom prst="chevron">
+            <a:avLst/>
+          </a:prstGeom>
+          <a:solidFill>
+            <a:srgbClr val="0B6E6E"/>
+          </a:solidFill>
+          <a:ln w="12700">
+            <a:solidFill>
+              <a:srgbClr val="0B6E6E"/>
+            </a:solidFill>
+            <a:prstDash val="solid"/>
+          </a:ln>
+        </p:spPr>
+      </p:sp>
+      <p:sp>
+        <p:nvSpPr>
+          <p:cNvPr id="7" name="Text 5"/>
+          <p:cNvSpPr txBox="1"/>
+          <p:nvPr/>
+        </p:nvSpPr>
+        <p:spPr>
+          <a:xfrm>
+            <a:off x="777240" y="1234440"/>
+            <a:ext cx="2240280" cy="548640"/>
+          </a:xfrm>
+          <a:prstGeom prst="rect">
+            <a:avLst/>
+          </a:prstGeom>
+          <a:noFill/>
+          <a:ln/>
+        </p:spPr>
+        <p:txBody>
+          <a:bodyPr wrap="square" lIns="0" tIns="0" rIns="0" bIns="0" rtlCol="0" anchor="ctr"/>
+          <a:lstStyle/>
+          <a:p>
+            <a:pPr algn="ctr" indent="0" marL="0">
+              <a:buNone/>
+            </a:pPr>
+            <a:r>
+              <a:rPr lang="en-US" sz="1100" b="1" dirty="0">
+                <a:solidFill>
+                  <a:srgbClr val="FFFFFF"/>
+                </a:solidFill>
+                <a:latin typeface="Meiryo" pitchFamily="34" charset="0"/>
+                <a:ea typeface="Meiryo" pitchFamily="34" charset="-122"/>
+                <a:cs typeface="Meiryo" pitchFamily="34" charset="-120"/>
+              </a:rPr>
+              <a:t>いま：画面上のデモで体験</a:t>
+            </a:r>
+            <a:endParaRPr lang="en-US" sz="1100" dirty="0"/>
+          </a:p>
+        </p:txBody>
+      </p:sp>
+      <p:sp>
+        <p:nvSpPr>
+          <p:cNvPr id="8" name="Shape 6"/>
+          <p:cNvSpPr/>
+          <p:nvPr/>
+        </p:nvSpPr>
+        <p:spPr>
+          <a:xfrm>
+            <a:off x="3200400" y="1234440"/>
+            <a:ext cx="2834640" cy="548640"/>
+          </a:xfrm>
+          <a:prstGeom prst="chevron">
+            <a:avLst/>
+          </a:prstGeom>
+          <a:solidFill>
+            <a:srgbClr val="E3F3F2"/>
+          </a:solidFill>
+          <a:ln w="12700">
+            <a:solidFill>
+              <a:srgbClr val="E3F3F2"/>
+            </a:solidFill>
+            <a:prstDash val="solid"/>
+          </a:ln>
+        </p:spPr>
+      </p:sp>
+      <p:sp>
+        <p:nvSpPr>
+          <p:cNvPr id="9" name="Text 7"/>
+          <p:cNvSpPr txBox="1"/>
+          <p:nvPr/>
+        </p:nvSpPr>
+        <p:spPr>
+          <a:xfrm>
+            <a:off x="3520440" y="1234440"/>
+            <a:ext cx="2240280" cy="548640"/>
+          </a:xfrm>
+          <a:prstGeom prst="rect">
+            <a:avLst/>
+          </a:prstGeom>
+          <a:noFill/>
+          <a:ln/>
+        </p:spPr>
+        <p:txBody>
+          <a:bodyPr wrap="square" lIns="0" tIns="0" rIns="0" bIns="0" rtlCol="0" anchor="ctr"/>
+          <a:lstStyle/>
+          <a:p>
+            <a:pPr algn="ctr" indent="0" marL="0">
+              <a:buNone/>
+            </a:pPr>
+            <a:r>
+              <a:rPr lang="en-US" sz="1100" b="1" dirty="0">
+                <a:solidFill>
+                  <a:srgbClr val="0B5563"/>
+                </a:solidFill>
+                <a:latin typeface="Meiryo" pitchFamily="34" charset="0"/>
+                <a:ea typeface="Meiryo" pitchFamily="34" charset="-122"/>
+                <a:cs typeface="Meiryo" pitchFamily="34" charset="-120"/>
+              </a:rPr>
+              <a:t>次：実際の電話回線につなぐ</a:t>
+            </a:r>
+            <a:endParaRPr lang="en-US" sz="1100" dirty="0"/>
+          </a:p>
+        </p:txBody>
+      </p:sp>
+      <p:sp>
+        <p:nvSpPr>
+          <p:cNvPr id="10" name="Shape 8"/>
+          <p:cNvSpPr/>
+          <p:nvPr/>
+        </p:nvSpPr>
+        <p:spPr>
+          <a:xfrm>
+            <a:off x="5943600" y="1234440"/>
+            <a:ext cx="2834640" cy="548640"/>
+          </a:xfrm>
+          <a:prstGeom prst="chevron">
+            <a:avLst/>
+          </a:prstGeom>
+          <a:solidFill>
+            <a:srgbClr val="E3F3F2"/>
+          </a:solidFill>
+          <a:ln w="12700">
+            <a:solidFill>
+              <a:srgbClr val="E3F3F2"/>
+            </a:solidFill>
+            <a:prstDash val="solid"/>
+          </a:ln>
+        </p:spPr>
+      </p:sp>
+      <p:sp>
+        <p:nvSpPr>
+          <p:cNvPr id="11" name="Text 9"/>
+          <p:cNvSpPr txBox="1"/>
+          <p:nvPr/>
+        </p:nvSpPr>
+        <p:spPr>
+          <a:xfrm>
+            <a:off x="6263640" y="1234440"/>
+            <a:ext cx="2240280" cy="548640"/>
+          </a:xfrm>
+          <a:prstGeom prst="rect">
+            <a:avLst/>
+          </a:prstGeom>
+          <a:noFill/>
+          <a:ln/>
+        </p:spPr>
+        <p:txBody>
+          <a:bodyPr wrap="square" lIns="0" tIns="0" rIns="0" bIns="0" rtlCol="0" anchor="ctr"/>
+          <a:lstStyle/>
+          <a:p>
+            <a:pPr algn="ctr" indent="0" marL="0">
+              <a:buNone/>
+            </a:pPr>
+            <a:r>
+              <a:rPr lang="en-US" sz="1100" b="1" dirty="0">
+                <a:solidFill>
+                  <a:srgbClr val="0B5563"/>
+                </a:solidFill>
+                <a:latin typeface="Meiryo" pitchFamily="34" charset="0"/>
+                <a:ea typeface="Meiryo" pitchFamily="34" charset="-122"/>
+                <a:cs typeface="Meiryo" pitchFamily="34" charset="-120"/>
+              </a:rPr>
+              <a:t>その先：対応できる会話を広げる</a:t>
+            </a:r>
+            <a:endParaRPr lang="en-US" sz="1100" dirty="0"/>
+          </a:p>
+        </p:txBody>
+      </p:sp>
+      <p:sp>
+        <p:nvSpPr>
+          <p:cNvPr id="12" name="Shape 10"/>
+          <p:cNvSpPr/>
+          <p:nvPr/>
+        </p:nvSpPr>
+        <p:spPr>
+          <a:xfrm>
+            <a:off x="457200" y="1965960"/>
+            <a:ext cx="4023360" cy="2697480"/>
+          </a:xfrm>
+          <a:prstGeom prst="roundRect">
+            <a:avLst>
+              <a:gd name="adj" fmla="val 2712"/>
+            </a:avLst>
+          </a:prstGeom>
+          <a:solidFill>
+            <a:srgbClr val="F3F6F7"/>
+          </a:solidFill>
+          <a:ln w="9525">
+            <a:solidFill>
+              <a:srgbClr val="F3F6F7"/>
+            </a:solidFill>
+            <a:prstDash val="solid"/>
+          </a:ln>
+        </p:spPr>
+      </p:sp>
+      <p:sp>
+        <p:nvSpPr>
+          <p:cNvPr id="13" name="Text 11"/>
+          <p:cNvSpPr txBox="1"/>
+          <p:nvPr/>
+        </p:nvSpPr>
+        <p:spPr>
+          <a:xfrm>
+            <a:off x="640080" y="2057400"/>
+            <a:ext cx="3657600" cy="320040"/>
+          </a:xfrm>
+          <a:prstGeom prst="rect">
+            <a:avLst/>
+          </a:prstGeom>
+          <a:noFill/>
+          <a:ln/>
+        </p:spPr>
+        <p:txBody>
+          <a:bodyPr wrap="square" lIns="0" tIns="0" rIns="0" bIns="0" rtlCol="0" anchor="t"/>
+          <a:lstStyle/>
+          <a:p>
+            <a:pPr indent="0" marL="0">
+              <a:buNone/>
+            </a:pPr>
+            <a:r>
+              <a:rPr lang="en-US" sz="1300" b="1" dirty="0">
+                <a:solidFill>
+                  <a:srgbClr val="0B6E6E"/>
+                </a:solidFill>
+                <a:latin typeface="Meiryo" pitchFamily="34" charset="0"/>
+                <a:ea typeface="Meiryo" pitchFamily="34" charset="-122"/>
+                <a:cs typeface="Meiryo" pitchFamily="34" charset="-120"/>
+              </a:rPr>
+              <a:t>いまできること（デモ版）</a:t>
+            </a:r>
+            <a:endParaRPr lang="en-US" sz="1300" dirty="0"/>
+          </a:p>
+        </p:txBody>
+      </p:sp>
+      <p:pic>
+        <p:nvPicPr>
+          <p:cNvPr id="14" name="Image 0" descr="preencoded.png">    </p:cNvPr>
+          <p:cNvPicPr>
+            <a:picLocks noChangeAspect="1"/>
+          </p:cNvPicPr>
+          <p:nvPr/>
+        </p:nvPicPr>
+        <p:blipFill>
+          <a:blip r:embed="rId1"/>
+          <a:stretch>
+            <a:fillRect/>
+          </a:stretch>
+        </p:blipFill>
+        <p:spPr>
+          <a:xfrm>
+            <a:off x="640080" y="2523744"/>
+            <a:ext cx="201168" cy="201168"/>
+          </a:xfrm>
+          <a:prstGeom prst="rect">
+            <a:avLst/>
+          </a:prstGeom>
+        </p:spPr>
+      </p:pic>
+      <p:sp>
+        <p:nvSpPr>
+          <p:cNvPr id="15" name="Text 12"/>
+          <p:cNvSpPr txBox="1"/>
+          <p:nvPr/>
+        </p:nvSpPr>
+        <p:spPr>
+          <a:xfrm>
+            <a:off x="960120" y="2468880"/>
+            <a:ext cx="3383280" cy="502920"/>
+          </a:xfrm>
+          <a:prstGeom prst="rect">
+            <a:avLst/>
+          </a:prstGeom>
+          <a:noFill/>
+          <a:ln/>
+        </p:spPr>
+        <p:txBody>
+          <a:bodyPr wrap="square" lIns="0" tIns="0" rIns="0" bIns="0" rtlCol="0" anchor="t"/>
+          <a:lstStyle/>
+          <a:p>
+            <a:pPr indent="0" marL="0">
+              <a:buNone/>
+            </a:pPr>
+            <a:r>
+              <a:rPr lang="en-US" sz="1050" dirty="0">
+                <a:solidFill>
+                  <a:srgbClr val="1E2A30"/>
+                </a:solidFill>
+                <a:latin typeface="Meiryo" pitchFamily="34" charset="0"/>
+                <a:ea typeface="Meiryo" pitchFamily="34" charset="-122"/>
+                <a:cs typeface="Meiryo" pitchFamily="34" charset="-120"/>
+              </a:rPr>
+              <a:t>パソコンの画面で、マイクに話しかけて AI と会話できる</a:t>
+            </a:r>
+            <a:endParaRPr lang="en-US" sz="1050" dirty="0"/>
+          </a:p>
+        </p:txBody>
+      </p:sp>
+      <p:pic>
+        <p:nvPicPr>
+          <p:cNvPr id="16" name="Image 1" descr="preencoded.png">    </p:cNvPr>
+          <p:cNvPicPr>
+            <a:picLocks noChangeAspect="1"/>
+          </p:cNvPicPr>
+          <p:nvPr/>
+        </p:nvPicPr>
+        <p:blipFill>
+          <a:blip r:embed="rId2"/>
+          <a:stretch>
+            <a:fillRect/>
+          </a:stretch>
+        </p:blipFill>
+        <p:spPr>
+          <a:xfrm>
+            <a:off x="640080" y="3054096"/>
+            <a:ext cx="201168" cy="201168"/>
+          </a:xfrm>
+          <a:prstGeom prst="rect">
+            <a:avLst/>
+          </a:prstGeom>
+        </p:spPr>
+      </p:pic>
+      <p:sp>
+        <p:nvSpPr>
+          <p:cNvPr id="17" name="Text 13"/>
+          <p:cNvSpPr txBox="1"/>
+          <p:nvPr/>
+        </p:nvSpPr>
+        <p:spPr>
+          <a:xfrm>
+            <a:off x="960120" y="2999232"/>
+            <a:ext cx="3383280" cy="502920"/>
+          </a:xfrm>
+          <a:prstGeom prst="rect">
+            <a:avLst/>
+          </a:prstGeom>
+          <a:noFill/>
+          <a:ln/>
+        </p:spPr>
+        <p:txBody>
+          <a:bodyPr wrap="square" lIns="0" tIns="0" rIns="0" bIns="0" rtlCol="0" anchor="t"/>
+          <a:lstStyle/>
+          <a:p>
+            <a:pPr indent="0" marL="0">
+              <a:buNone/>
+            </a:pPr>
+            <a:r>
+              <a:rPr lang="en-US" sz="1050" dirty="0">
+                <a:solidFill>
+                  <a:srgbClr val="1E2A30"/>
+                </a:solidFill>
+                <a:latin typeface="Meiryo" pitchFamily="34" charset="0"/>
+                <a:ea typeface="Meiryo" pitchFamily="34" charset="-122"/>
+                <a:cs typeface="Meiryo" pitchFamily="34" charset="-120"/>
+              </a:rPr>
+              <a:t>台本と判断ルールにそって、用意した音声で毎回同じ品質で応答する</a:t>
+            </a:r>
+            <a:endParaRPr lang="en-US" sz="1050" dirty="0"/>
+          </a:p>
+        </p:txBody>
+      </p:sp>
+      <p:pic>
+        <p:nvPicPr>
+          <p:cNvPr id="18" name="Image 2" descr="preencoded.png">    </p:cNvPr>
+          <p:cNvPicPr>
+            <a:picLocks noChangeAspect="1"/>
+          </p:cNvPicPr>
+          <p:nvPr/>
+        </p:nvPicPr>
+        <p:blipFill>
+          <a:blip r:embed="rId3"/>
+          <a:stretch>
+            <a:fillRect/>
+          </a:stretch>
+        </p:blipFill>
+        <p:spPr>
+          <a:xfrm>
+            <a:off x="640080" y="3584448"/>
+            <a:ext cx="201168" cy="201168"/>
+          </a:xfrm>
+          <a:prstGeom prst="rect">
+            <a:avLst/>
+          </a:prstGeom>
+        </p:spPr>
+      </p:pic>
+      <p:sp>
+        <p:nvSpPr>
+          <p:cNvPr id="19" name="Text 14"/>
+          <p:cNvSpPr txBox="1"/>
+          <p:nvPr/>
+        </p:nvSpPr>
+        <p:spPr>
+          <a:xfrm>
+            <a:off x="960120" y="3529584"/>
+            <a:ext cx="3383280" cy="502920"/>
+          </a:xfrm>
+          <a:prstGeom prst="rect">
+            <a:avLst/>
+          </a:prstGeom>
+          <a:noFill/>
+          <a:ln/>
+        </p:spPr>
+        <p:txBody>
+          <a:bodyPr wrap="square" lIns="0" tIns="0" rIns="0" bIns="0" rtlCol="0" anchor="t"/>
+          <a:lstStyle/>
+          <a:p>
+            <a:pPr indent="0" marL="0">
+              <a:buNone/>
+            </a:pPr>
+            <a:r>
+              <a:rPr lang="en-US" sz="1050" dirty="0">
+                <a:solidFill>
+                  <a:srgbClr val="1E2A30"/>
+                </a:solidFill>
+                <a:latin typeface="Meiryo" pitchFamily="34" charset="0"/>
+                <a:ea typeface="Meiryo" pitchFamily="34" charset="-122"/>
+                <a:cs typeface="Meiryo" pitchFamily="34" charset="-120"/>
+              </a:rPr>
+              <a:t>判断の理由と聞き取り状況が、その場で画面に見える</a:t>
+            </a:r>
+            <a:endParaRPr lang="en-US" sz="1050" dirty="0"/>
+          </a:p>
+        </p:txBody>
+      </p:sp>
+      <p:pic>
+        <p:nvPicPr>
+          <p:cNvPr id="20" name="Image 3" descr="preencoded.png">    </p:cNvPr>
+          <p:cNvPicPr>
+            <a:picLocks noChangeAspect="1"/>
+          </p:cNvPicPr>
+          <p:nvPr/>
+        </p:nvPicPr>
+        <p:blipFill>
+          <a:blip r:embed="rId4"/>
+          <a:stretch>
+            <a:fillRect/>
+          </a:stretch>
+        </p:blipFill>
+        <p:spPr>
+          <a:xfrm>
+            <a:off x="640080" y="4114800"/>
+            <a:ext cx="201168" cy="201168"/>
+          </a:xfrm>
+          <a:prstGeom prst="rect">
+            <a:avLst/>
+          </a:prstGeom>
+        </p:spPr>
+      </p:pic>
+      <p:sp>
+        <p:nvSpPr>
+          <p:cNvPr id="21" name="Text 15"/>
+          <p:cNvSpPr txBox="1"/>
+          <p:nvPr/>
+        </p:nvSpPr>
+        <p:spPr>
+          <a:xfrm>
+            <a:off x="960120" y="4059936"/>
+            <a:ext cx="3383280" cy="502920"/>
+          </a:xfrm>
+          <a:prstGeom prst="rect">
+            <a:avLst/>
+          </a:prstGeom>
+          <a:noFill/>
+          <a:ln/>
+        </p:spPr>
+        <p:txBody>
+          <a:bodyPr wrap="square" lIns="0" tIns="0" rIns="0" bIns="0" rtlCol="0" anchor="t"/>
+          <a:lstStyle/>
+          <a:p>
+            <a:pPr indent="0" marL="0">
+              <a:buNone/>
+            </a:pPr>
+            <a:r>
+              <a:rPr lang="en-US" sz="1050" dirty="0">
+                <a:solidFill>
+                  <a:srgbClr val="1E2A30"/>
+                </a:solidFill>
+                <a:latin typeface="Meiryo" pitchFamily="34" charset="0"/>
+                <a:ea typeface="Meiryo" pitchFamily="34" charset="-122"/>
+                <a:cs typeface="Meiryo" pitchFamily="34" charset="-120"/>
+              </a:rPr>
+              <a:t>終わった通話は架電履歴に自動で保存し、あとから見返せる</a:t>
+            </a:r>
+            <a:endParaRPr lang="en-US" sz="1050" dirty="0"/>
+          </a:p>
+        </p:txBody>
+      </p:sp>
+      <p:sp>
+        <p:nvSpPr>
+          <p:cNvPr id="22" name="Shape 16"/>
+          <p:cNvSpPr/>
+          <p:nvPr/>
+        </p:nvSpPr>
+        <p:spPr>
+          <a:xfrm>
+            <a:off x="4663440" y="1965960"/>
+            <a:ext cx="4023360" cy="2697480"/>
+          </a:xfrm>
+          <a:prstGeom prst="roundRect">
+            <a:avLst>
+              <a:gd name="adj" fmla="val 2712"/>
+            </a:avLst>
+          </a:prstGeom>
+          <a:solidFill>
+            <a:srgbClr val="FDF1DC"/>
+          </a:solidFill>
+          <a:ln w="9525">
+            <a:solidFill>
+              <a:srgbClr val="FDF1DC"/>
+            </a:solidFill>
+            <a:prstDash val="solid"/>
+          </a:ln>
+        </p:spPr>
+      </p:sp>
+      <p:sp>
+        <p:nvSpPr>
+          <p:cNvPr id="23" name="Text 17"/>
+          <p:cNvSpPr txBox="1"/>
+          <p:nvPr/>
+        </p:nvSpPr>
+        <p:spPr>
+          <a:xfrm>
+            <a:off x="4846320" y="2057400"/>
+            <a:ext cx="3657600" cy="320040"/>
+          </a:xfrm>
+          <a:prstGeom prst="rect">
+            <a:avLst/>
+          </a:prstGeom>
+          <a:noFill/>
+          <a:ln/>
+        </p:spPr>
+        <p:txBody>
+          <a:bodyPr wrap="square" lIns="0" tIns="0" rIns="0" bIns="0" rtlCol="0" anchor="t"/>
+          <a:lstStyle/>
+          <a:p>
+            <a:pPr indent="0" marL="0">
+              <a:buNone/>
+            </a:pPr>
+            <a:r>
+              <a:rPr lang="en-US" sz="1300" b="1" dirty="0">
+                <a:solidFill>
+                  <a:srgbClr val="8A5A00"/>
+                </a:solidFill>
+                <a:latin typeface="Meiryo" pitchFamily="34" charset="0"/>
+                <a:ea typeface="Meiryo" pitchFamily="34" charset="-122"/>
+                <a:cs typeface="Meiryo" pitchFamily="34" charset="-120"/>
+              </a:rPr>
+              <a:t>これから取り組むこと</a:t>
+            </a:r>
+            <a:endParaRPr lang="en-US" sz="1300" dirty="0"/>
+          </a:p>
+        </p:txBody>
+      </p:sp>
+      <p:pic>
+        <p:nvPicPr>
+          <p:cNvPr id="24" name="Image 4" descr="preencoded.png">    </p:cNvPr>
+          <p:cNvPicPr>
+            <a:picLocks noChangeAspect="1"/>
+          </p:cNvPicPr>
+          <p:nvPr/>
+        </p:nvPicPr>
+        <p:blipFill>
+          <a:blip r:embed="rId5"/>
+          <a:stretch>
+            <a:fillRect/>
+          </a:stretch>
+        </p:blipFill>
+        <p:spPr>
+          <a:xfrm>
+            <a:off x="4846320" y="2523744"/>
+            <a:ext cx="201168" cy="201168"/>
+          </a:xfrm>
+          <a:prstGeom prst="rect">
+            <a:avLst/>
+          </a:prstGeom>
+        </p:spPr>
+      </p:pic>
+      <p:sp>
+        <p:nvSpPr>
+          <p:cNvPr id="25" name="Text 18"/>
+          <p:cNvSpPr txBox="1"/>
+          <p:nvPr/>
+        </p:nvSpPr>
+        <p:spPr>
+          <a:xfrm>
+            <a:off x="5166360" y="2468880"/>
+            <a:ext cx="3383280" cy="502920"/>
+          </a:xfrm>
+          <a:prstGeom prst="rect">
+            <a:avLst/>
+          </a:prstGeom>
+          <a:noFill/>
+          <a:ln/>
+        </p:spPr>
+        <p:txBody>
+          <a:bodyPr wrap="square" lIns="0" tIns="0" rIns="0" bIns="0" rtlCol="0" anchor="t"/>
+          <a:lstStyle/>
+          <a:p>
+            <a:pPr indent="0" marL="0">
+              <a:buNone/>
+            </a:pPr>
+            <a:r>
+              <a:rPr lang="en-US" sz="1050" dirty="0">
+                <a:solidFill>
+                  <a:srgbClr val="1E2A30"/>
+                </a:solidFill>
+                <a:latin typeface="Meiryo" pitchFamily="34" charset="0"/>
+                <a:ea typeface="Meiryo" pitchFamily="34" charset="-122"/>
+                <a:cs typeface="Meiryo" pitchFamily="34" charset="-120"/>
+              </a:rPr>
+              <a:t>実際の電話回線とつないで、本物の電話で試す</a:t>
+            </a:r>
+            <a:endParaRPr lang="en-US" sz="1050" dirty="0"/>
+          </a:p>
+        </p:txBody>
+      </p:sp>
+      <p:pic>
+        <p:nvPicPr>
+          <p:cNvPr id="26" name="Image 5" descr="preencoded.png">    </p:cNvPr>
+          <p:cNvPicPr>
+            <a:picLocks noChangeAspect="1"/>
+          </p:cNvPicPr>
+          <p:nvPr/>
+        </p:nvPicPr>
+        <p:blipFill>
+          <a:blip r:embed="rId6"/>
+          <a:stretch>
+            <a:fillRect/>
+          </a:stretch>
+        </p:blipFill>
+        <p:spPr>
+          <a:xfrm>
+            <a:off x="4846320" y="3054096"/>
+            <a:ext cx="201168" cy="201168"/>
+          </a:xfrm>
+          <a:prstGeom prst="rect">
+            <a:avLst/>
+          </a:prstGeom>
+        </p:spPr>
+      </p:pic>
+      <p:sp>
+        <p:nvSpPr>
+          <p:cNvPr id="27" name="Text 19"/>
+          <p:cNvSpPr txBox="1"/>
+          <p:nvPr/>
+        </p:nvSpPr>
+        <p:spPr>
+          <a:xfrm>
+            <a:off x="5166360" y="2999232"/>
+            <a:ext cx="3383280" cy="502920"/>
+          </a:xfrm>
+          <a:prstGeom prst="rect">
+            <a:avLst/>
+          </a:prstGeom>
+          <a:noFill/>
+          <a:ln/>
+        </p:spPr>
+        <p:txBody>
+          <a:bodyPr wrap="square" lIns="0" tIns="0" rIns="0" bIns="0" rtlCol="0" anchor="t"/>
+          <a:lstStyle/>
+          <a:p>
+            <a:pPr indent="0" marL="0">
+              <a:buNone/>
+            </a:pPr>
+            <a:r>
+              <a:rPr lang="en-US" sz="1050" dirty="0">
+                <a:solidFill>
+                  <a:srgbClr val="1E2A30"/>
+                </a:solidFill>
+                <a:latin typeface="Meiryo" pitchFamily="34" charset="0"/>
+                <a:ea typeface="Meiryo" pitchFamily="34" charset="-122"/>
+                <a:cs typeface="Meiryo" pitchFamily="34" charset="-120"/>
+              </a:rPr>
+              <a:t>想定外の言い回しへの対応を強化（生成AIを組み込む準備は済み、品質の確認はこれから）</a:t>
+            </a:r>
+            <a:endParaRPr lang="en-US" sz="1050" dirty="0"/>
+          </a:p>
+        </p:txBody>
+      </p:sp>
+      <p:pic>
+        <p:nvPicPr>
+          <p:cNvPr id="28" name="Image 6" descr="preencoded.png">    </p:cNvPr>
+          <p:cNvPicPr>
+            <a:picLocks noChangeAspect="1"/>
+          </p:cNvPicPr>
+          <p:nvPr/>
+        </p:nvPicPr>
+        <p:blipFill>
+          <a:blip r:embed="rId7"/>
+          <a:stretch>
+            <a:fillRect/>
+          </a:stretch>
+        </p:blipFill>
+        <p:spPr>
+          <a:xfrm>
+            <a:off x="4846320" y="3584448"/>
+            <a:ext cx="201168" cy="201168"/>
+          </a:xfrm>
+          <a:prstGeom prst="rect">
+            <a:avLst/>
+          </a:prstGeom>
+        </p:spPr>
+      </p:pic>
+      <p:sp>
+        <p:nvSpPr>
+          <p:cNvPr id="29" name="Text 20"/>
+          <p:cNvSpPr txBox="1"/>
+          <p:nvPr/>
+        </p:nvSpPr>
+        <p:spPr>
+          <a:xfrm>
+            <a:off x="5166360" y="3529584"/>
+            <a:ext cx="3383280" cy="502920"/>
+          </a:xfrm>
+          <a:prstGeom prst="rect">
+            <a:avLst/>
+          </a:prstGeom>
+          <a:noFill/>
+          <a:ln/>
+        </p:spPr>
+        <p:txBody>
+          <a:bodyPr wrap="square" lIns="0" tIns="0" rIns="0" bIns="0" rtlCol="0" anchor="t"/>
+          <a:lstStyle/>
+          <a:p>
+            <a:pPr indent="0" marL="0">
+              <a:buNone/>
+            </a:pPr>
+            <a:r>
+              <a:rPr lang="en-US" sz="1050" dirty="0">
+                <a:solidFill>
+                  <a:srgbClr val="1E2A30"/>
+                </a:solidFill>
+                <a:latin typeface="Meiryo" pitchFamily="34" charset="0"/>
+                <a:ea typeface="Meiryo" pitchFamily="34" charset="-122"/>
+                <a:cs typeface="Meiryo" pitchFamily="34" charset="-120"/>
+              </a:rPr>
+              <a:t>通話の記録を顧客管理の仕組みへ送る（いまはブラウザの中だけに保存）</a:t>
+            </a:r>
+            <a:endParaRPr lang="en-US" sz="1050" dirty="0"/>
+          </a:p>
+        </p:txBody>
+      </p:sp>
+      <p:pic>
+        <p:nvPicPr>
+          <p:cNvPr id="30" name="Image 7" descr="preencoded.png">    </p:cNvPr>
+          <p:cNvPicPr>
+            <a:picLocks noChangeAspect="1"/>
+          </p:cNvPicPr>
+          <p:nvPr/>
+        </p:nvPicPr>
+        <p:blipFill>
+          <a:blip r:embed="rId8"/>
+          <a:stretch>
+            <a:fillRect/>
+          </a:stretch>
+        </p:blipFill>
+        <p:spPr>
+          <a:xfrm>
+            <a:off x="4846320" y="4114800"/>
+            <a:ext cx="201168" cy="201168"/>
+          </a:xfrm>
+          <a:prstGeom prst="rect">
+            <a:avLst/>
+          </a:prstGeom>
+        </p:spPr>
+      </p:pic>
+      <p:sp>
+        <p:nvSpPr>
+          <p:cNvPr id="31" name="Text 21"/>
+          <p:cNvSpPr txBox="1"/>
+          <p:nvPr/>
+        </p:nvSpPr>
+        <p:spPr>
+          <a:xfrm>
+            <a:off x="5166360" y="4059936"/>
+            <a:ext cx="3383280" cy="502920"/>
+          </a:xfrm>
+          <a:prstGeom prst="rect">
+            <a:avLst/>
+          </a:prstGeom>
+          <a:noFill/>
+          <a:ln/>
+        </p:spPr>
+        <p:txBody>
+          <a:bodyPr wrap="square" lIns="0" tIns="0" rIns="0" bIns="0" rtlCol="0" anchor="t"/>
+          <a:lstStyle/>
+          <a:p>
+            <a:pPr indent="0" marL="0">
+              <a:buNone/>
+            </a:pPr>
+            <a:r>
+              <a:rPr lang="en-US" sz="1050" dirty="0">
+                <a:solidFill>
+                  <a:srgbClr val="1E2A30"/>
+                </a:solidFill>
+                <a:latin typeface="Meiryo" pitchFamily="34" charset="0"/>
+                <a:ea typeface="Meiryo" pitchFamily="34" charset="-122"/>
+                <a:cs typeface="Meiryo" pitchFamily="34" charset="-120"/>
+              </a:rPr>
+              <a:t>かけ直し・日程変更の電話、資料送付後のフォロー</a:t>
+            </a:r>
+            <a:endParaRPr lang="en-US" sz="1050" dirty="0"/>
+          </a:p>
+        </p:txBody>
+      </p:sp>
+    </p:spTree>
+  </p:cSld>
+  <p:clrMapOvr>
+    <a:masterClrMapping/>
+  </p:clrMapOvr>
+</p:sld>
+</file>
+
+<file path=ppt/slides/slide17.xml><?xml version="1.0" encoding="utf-8"?>
+<p:sld xmlns:a="http://schemas.openxmlformats.org/drawingml/2006/main" xmlns:r="http://schemas.openxmlformats.org/officeDocument/2006/relationships" xmlns:p="http://schemas.openxmlformats.org/presentationml/2006/main">
+  <p:cSld name="Slide 17">
     <p:bg>
       <p:bgPr>
         <a:solidFill>
@@ -11380,7 +12317,7 @@
                 <a:ea typeface="Meiryo" pitchFamily="34" charset="-122"/>
                 <a:cs typeface="Meiryo" pitchFamily="34" charset="-120"/>
               </a:rPr>
-              <a:t>2 / 16</a:t>
+              <a:t>2 / 17</a:t>
             </a:r>
             <a:endParaRPr lang="en-US" sz="900" dirty="0"/>
           </a:p>
@@ -12363,7 +13300,7 @@
                 <a:ea typeface="Meiryo" pitchFamily="34" charset="-122"/>
                 <a:cs typeface="Meiryo" pitchFamily="34" charset="-120"/>
               </a:rPr>
-              <a:t>3 / 16</a:t>
+              <a:t>3 / 17</a:t>
             </a:r>
             <a:endParaRPr lang="en-US" sz="900" dirty="0"/>
           </a:p>
@@ -13193,7 +14130,7 @@
                 <a:ea typeface="Meiryo" pitchFamily="34" charset="-122"/>
                 <a:cs typeface="Meiryo" pitchFamily="34" charset="-120"/>
               </a:rPr>
-              <a:t>4 / 16</a:t>
+              <a:t>4 / 17</a:t>
             </a:r>
             <a:endParaRPr lang="en-US" sz="900" dirty="0"/>
           </a:p>
@@ -14345,7 +15282,7 @@
                 <a:ea typeface="Meiryo" pitchFamily="34" charset="-122"/>
                 <a:cs typeface="Meiryo" pitchFamily="34" charset="-120"/>
               </a:rPr>
-              <a:t>5 / 16</a:t>
+              <a:t>5 / 17</a:t>
             </a:r>
             <a:endParaRPr lang="en-US" sz="900" dirty="0"/>
           </a:p>
@@ -15340,7 +16277,7 @@
                 <a:ea typeface="Meiryo" pitchFamily="34" charset="-122"/>
                 <a:cs typeface="Meiryo" pitchFamily="34" charset="-120"/>
               </a:rPr>
-              <a:t>日時や人数などを書き込み、聞けていない項目を把握します</a:t>
+              <a:t>日時や人数を書き込み、電話が終わると架電履歴に保存します</a:t>
             </a:r>
             <a:endParaRPr lang="en-US" sz="1050" dirty="0"/>
           </a:p>
@@ -15606,7 +16543,7 @@
                 <a:ea typeface="Meiryo" pitchFamily="34" charset="-122"/>
                 <a:cs typeface="Meiryo" pitchFamily="34" charset="-120"/>
               </a:rPr>
-              <a:t>6 / 16</a:t>
+              <a:t>6 / 17</a:t>
             </a:r>
             <a:endParaRPr lang="en-US" sz="900" dirty="0"/>
           </a:p>
@@ -16602,7 +17539,7 @@
                 <a:ea typeface="Meiryo" pitchFamily="34" charset="-122"/>
                 <a:cs typeface="Meiryo" pitchFamily="34" charset="-120"/>
               </a:rPr>
-              <a:t>7 / 16</a:t>
+              <a:t>7 / 17</a:t>
             </a:r>
             <a:endParaRPr lang="en-US" sz="900" dirty="0"/>
           </a:p>
@@ -16616,12 +17553,12 @@
         </p:nvSpPr>
         <p:spPr>
           <a:xfrm>
-            <a:off x="457200" y="1234440"/>
-            <a:ext cx="1920240" cy="1463040"/>
+            <a:off x="457200" y="1207008"/>
+            <a:ext cx="1536192" cy="1481328"/>
           </a:xfrm>
           <a:prstGeom prst="roundRect">
             <a:avLst>
-              <a:gd name="adj" fmla="val 5000"/>
+              <a:gd name="adj" fmla="val 4938"/>
             </a:avLst>
           </a:prstGeom>
           <a:solidFill>
@@ -16650,8 +17587,8 @@
         </p:nvSpPr>
         <p:spPr>
           <a:xfrm>
-            <a:off x="585216" y="1362456"/>
-            <a:ext cx="384048" cy="384048"/>
+            <a:off x="566928" y="1344168"/>
+            <a:ext cx="329184" cy="329184"/>
           </a:xfrm>
           <a:prstGeom prst="ellipse">
             <a:avLst/>
@@ -16675,8 +17612,8 @@
         </p:nvSpPr>
         <p:spPr>
           <a:xfrm>
-            <a:off x="585216" y="1362456"/>
-            <a:ext cx="384048" cy="384048"/>
+            <a:off x="566928" y="1344168"/>
+            <a:ext cx="329184" cy="329184"/>
           </a:xfrm>
           <a:prstGeom prst="rect">
             <a:avLst/>
@@ -16692,7 +17629,7 @@
               <a:buNone/>
             </a:pPr>
             <a:r>
-              <a:rPr lang="en-US" sz="1300" b="1" dirty="0">
+              <a:rPr lang="en-US" sz="1100" b="1" dirty="0">
                 <a:solidFill>
                   <a:srgbClr val="FFFFFF"/>
                 </a:solidFill>
@@ -16702,7 +17639,7 @@
               </a:rPr>
               <a:t>1</a:t>
             </a:r>
-            <a:endParaRPr lang="en-US" sz="1300" dirty="0"/>
+            <a:endParaRPr lang="en-US" sz="1100" dirty="0"/>
           </a:p>
         </p:txBody>
       </p:sp>
@@ -16714,8 +17651,8 @@
         </p:nvSpPr>
         <p:spPr>
           <a:xfrm>
-            <a:off x="1042416" y="1325880"/>
-            <a:ext cx="1261872" cy="457200"/>
+            <a:off x="950976" y="1280160"/>
+            <a:ext cx="987552" cy="457200"/>
           </a:xfrm>
           <a:prstGeom prst="rect">
             <a:avLst/>
@@ -16731,7 +17668,7 @@
               <a:buNone/>
             </a:pPr>
             <a:r>
-              <a:rPr lang="en-US" sz="1200" b="1" dirty="0">
+              <a:rPr lang="en-US" sz="1050" b="1" dirty="0">
                 <a:solidFill>
                   <a:srgbClr val="1E2A30"/>
                 </a:solidFill>
@@ -16741,14 +17678,14 @@
               </a:rPr>
               <a:t>受付に</a:t>
             </a:r>
-            <a:endParaRPr lang="en-US" sz="1200" dirty="0"/>
+            <a:endParaRPr lang="en-US" sz="1050" dirty="0"/>
           </a:p>
           <a:p>
             <a:pPr indent="0" marL="0">
               <a:buNone/>
             </a:pPr>
             <a:r>
-              <a:rPr lang="en-US" sz="1200" b="1" dirty="0">
+              <a:rPr lang="en-US" sz="1050" b="1" dirty="0">
                 <a:solidFill>
                   <a:srgbClr val="1E2A30"/>
                 </a:solidFill>
@@ -16758,7 +17695,7 @@
               </a:rPr>
               <a:t>取次ぎを頼む</a:t>
             </a:r>
-            <a:endParaRPr lang="en-US" sz="1200" dirty="0"/>
+            <a:endParaRPr lang="en-US" sz="1050" dirty="0"/>
           </a:p>
         </p:txBody>
       </p:sp>
@@ -16770,8 +17707,8 @@
         </p:nvSpPr>
         <p:spPr>
           <a:xfrm>
-            <a:off x="603504" y="1874520"/>
-            <a:ext cx="1645920" cy="777240"/>
+            <a:off x="566928" y="1810512"/>
+            <a:ext cx="1316736" cy="822960"/>
           </a:xfrm>
           <a:prstGeom prst="rect">
             <a:avLst/>
@@ -16787,7 +17724,7 @@
               <a:buNone/>
             </a:pPr>
             <a:r>
-              <a:rPr lang="en-US" sz="950" dirty="0">
+              <a:rPr lang="en-US" sz="900" dirty="0">
                 <a:solidFill>
                   <a:srgbClr val="0B5563"/>
                 </a:solidFill>
@@ -16797,7 +17734,7 @@
               </a:rPr>
               <a:t>「法改正の件で、ご担当者様にお繋ぎいただけますでしょうか？」</a:t>
             </a:r>
-            <a:endParaRPr lang="en-US" sz="950" dirty="0"/>
+            <a:endParaRPr lang="en-US" sz="900" dirty="0"/>
           </a:p>
         </p:txBody>
       </p:sp>
@@ -16809,12 +17746,12 @@
         </p:nvSpPr>
         <p:spPr>
           <a:xfrm>
-            <a:off x="2560320" y="1234440"/>
-            <a:ext cx="1920240" cy="1463040"/>
+            <a:off x="2130552" y="1207008"/>
+            <a:ext cx="1536192" cy="1481328"/>
           </a:xfrm>
           <a:prstGeom prst="roundRect">
             <a:avLst>
-              <a:gd name="adj" fmla="val 5000"/>
+              <a:gd name="adj" fmla="val 4938"/>
             </a:avLst>
           </a:prstGeom>
           <a:solidFill>
@@ -16843,8 +17780,8 @@
         </p:nvSpPr>
         <p:spPr>
           <a:xfrm>
-            <a:off x="2688336" y="1362456"/>
-            <a:ext cx="384048" cy="384048"/>
+            <a:off x="2240280" y="1344168"/>
+            <a:ext cx="329184" cy="329184"/>
           </a:xfrm>
           <a:prstGeom prst="ellipse">
             <a:avLst/>
@@ -16868,8 +17805,8 @@
         </p:nvSpPr>
         <p:spPr>
           <a:xfrm>
-            <a:off x="2688336" y="1362456"/>
-            <a:ext cx="384048" cy="384048"/>
+            <a:off x="2240280" y="1344168"/>
+            <a:ext cx="329184" cy="329184"/>
           </a:xfrm>
           <a:prstGeom prst="rect">
             <a:avLst/>
@@ -16885,7 +17822,7 @@
               <a:buNone/>
             </a:pPr>
             <a:r>
-              <a:rPr lang="en-US" sz="1300" b="1" dirty="0">
+              <a:rPr lang="en-US" sz="1100" b="1" dirty="0">
                 <a:solidFill>
                   <a:srgbClr val="FFFFFF"/>
                 </a:solidFill>
@@ -16895,7 +17832,7 @@
               </a:rPr>
               <a:t>2</a:t>
             </a:r>
-            <a:endParaRPr lang="en-US" sz="1300" dirty="0"/>
+            <a:endParaRPr lang="en-US" sz="1100" dirty="0"/>
           </a:p>
         </p:txBody>
       </p:sp>
@@ -16907,8 +17844,8 @@
         </p:nvSpPr>
         <p:spPr>
           <a:xfrm>
-            <a:off x="3145536" y="1325880"/>
-            <a:ext cx="1261872" cy="457200"/>
+            <a:off x="2624328" y="1280160"/>
+            <a:ext cx="987552" cy="457200"/>
           </a:xfrm>
           <a:prstGeom prst="rect">
             <a:avLst/>
@@ -16924,7 +17861,7 @@
               <a:buNone/>
             </a:pPr>
             <a:r>
-              <a:rPr lang="en-US" sz="1200" b="1" dirty="0">
+              <a:rPr lang="en-US" sz="1050" b="1" dirty="0">
                 <a:solidFill>
                   <a:srgbClr val="1E2A30"/>
                 </a:solidFill>
@@ -16932,9 +17869,26 @@
                 <a:ea typeface="Meiryo" pitchFamily="34" charset="-122"/>
                 <a:cs typeface="Meiryo" pitchFamily="34" charset="-120"/>
               </a:rPr>
-              <a:t>用件を伝える</a:t>
-            </a:r>
-            <a:endParaRPr lang="en-US" sz="1200" dirty="0"/>
+              <a:t>保留中は</a:t>
+            </a:r>
+            <a:endParaRPr lang="en-US" sz="1050" dirty="0"/>
+          </a:p>
+          <a:p>
+            <a:pPr indent="0" marL="0">
+              <a:buNone/>
+            </a:pPr>
+            <a:r>
+              <a:rPr lang="en-US" sz="1050" b="1" dirty="0">
+                <a:solidFill>
+                  <a:srgbClr val="1E2A30"/>
+                </a:solidFill>
+                <a:latin typeface="Meiryo" pitchFamily="34" charset="0"/>
+                <a:ea typeface="Meiryo" pitchFamily="34" charset="-122"/>
+                <a:cs typeface="Meiryo" pitchFamily="34" charset="-120"/>
+              </a:rPr>
+              <a:t>黙って待つ</a:t>
+            </a:r>
+            <a:endParaRPr lang="en-US" sz="1050" dirty="0"/>
           </a:p>
         </p:txBody>
       </p:sp>
@@ -16946,8 +17900,8 @@
         </p:nvSpPr>
         <p:spPr>
           <a:xfrm>
-            <a:off x="2706624" y="1874520"/>
-            <a:ext cx="1645920" cy="777240"/>
+            <a:off x="2240280" y="1810512"/>
+            <a:ext cx="1316736" cy="822960"/>
           </a:xfrm>
           <a:prstGeom prst="rect">
             <a:avLst/>
@@ -16963,17 +17917,17 @@
               <a:buNone/>
             </a:pPr>
             <a:r>
-              <a:rPr lang="en-US" sz="950" dirty="0">
-                <a:solidFill>
-                  <a:srgbClr val="0B5563"/>
-                </a:solidFill>
-                <a:latin typeface="Meiryo" pitchFamily="34" charset="0"/>
-                <a:ea typeface="Meiryo" pitchFamily="34" charset="-122"/>
-                <a:cs typeface="Meiryo" pitchFamily="34" charset="-120"/>
-              </a:rPr>
-              <a:t>「今回の法改正で、事業主様の節税効果などのメリットが大きくなっております」</a:t>
-            </a:r>
-            <a:endParaRPr lang="en-US" sz="950" dirty="0"/>
+              <a:rPr lang="en-US" sz="900" dirty="0">
+                <a:solidFill>
+                  <a:srgbClr val="1E2A30"/>
+                </a:solidFill>
+                <a:latin typeface="Meiryo" pitchFamily="34" charset="0"/>
+                <a:ea typeface="Meiryo" pitchFamily="34" charset="-122"/>
+                <a:cs typeface="Meiryo" pitchFamily="34" charset="-120"/>
+              </a:rPr>
+              <a:t>「少々お待ちください」の間は話さず、担当者が出るのを待つ</a:t>
+            </a:r>
+            <a:endParaRPr lang="en-US" sz="900" dirty="0"/>
           </a:p>
         </p:txBody>
       </p:sp>
@@ -16985,12 +17939,12 @@
         </p:nvSpPr>
         <p:spPr>
           <a:xfrm>
-            <a:off x="4663440" y="1234440"/>
-            <a:ext cx="1920240" cy="1463040"/>
+            <a:off x="3803904" y="1207008"/>
+            <a:ext cx="1536192" cy="1481328"/>
           </a:xfrm>
           <a:prstGeom prst="roundRect">
             <a:avLst>
-              <a:gd name="adj" fmla="val 5000"/>
+              <a:gd name="adj" fmla="val 4938"/>
             </a:avLst>
           </a:prstGeom>
           <a:solidFill>
@@ -17019,8 +17973,8 @@
         </p:nvSpPr>
         <p:spPr>
           <a:xfrm>
-            <a:off x="4791456" y="1362456"/>
-            <a:ext cx="384048" cy="384048"/>
+            <a:off x="3913632" y="1344168"/>
+            <a:ext cx="329184" cy="329184"/>
           </a:xfrm>
           <a:prstGeom prst="ellipse">
             <a:avLst/>
@@ -17044,8 +17998,8 @@
         </p:nvSpPr>
         <p:spPr>
           <a:xfrm>
-            <a:off x="4791456" y="1362456"/>
-            <a:ext cx="384048" cy="384048"/>
+            <a:off x="3913632" y="1344168"/>
+            <a:ext cx="329184" cy="329184"/>
           </a:xfrm>
           <a:prstGeom prst="rect">
             <a:avLst/>
@@ -17061,7 +18015,7 @@
               <a:buNone/>
             </a:pPr>
             <a:r>
-              <a:rPr lang="en-US" sz="1300" b="1" dirty="0">
+              <a:rPr lang="en-US" sz="1100" b="1" dirty="0">
                 <a:solidFill>
                   <a:srgbClr val="FFFFFF"/>
                 </a:solidFill>
@@ -17071,7 +18025,7 @@
               </a:rPr>
               <a:t>3</a:t>
             </a:r>
-            <a:endParaRPr lang="en-US" sz="1300" dirty="0"/>
+            <a:endParaRPr lang="en-US" sz="1100" dirty="0"/>
           </a:p>
         </p:txBody>
       </p:sp>
@@ -17083,8 +18037,8 @@
         </p:nvSpPr>
         <p:spPr>
           <a:xfrm>
-            <a:off x="5248656" y="1325880"/>
-            <a:ext cx="1261872" cy="457200"/>
+            <a:off x="4297680" y="1280160"/>
+            <a:ext cx="987552" cy="457200"/>
           </a:xfrm>
           <a:prstGeom prst="rect">
             <a:avLst/>
@@ -17100,7 +18054,7 @@
               <a:buNone/>
             </a:pPr>
             <a:r>
-              <a:rPr lang="en-US" sz="1200" b="1" dirty="0">
+              <a:rPr lang="en-US" sz="1050" b="1" dirty="0">
                 <a:solidFill>
                   <a:srgbClr val="1E2A30"/>
                 </a:solidFill>
@@ -17108,9 +18062,26 @@
                 <a:ea typeface="Meiryo" pitchFamily="34" charset="-122"/>
                 <a:cs typeface="Meiryo" pitchFamily="34" charset="-120"/>
               </a:rPr>
-              <a:t>年齢と人数を聞く</a:t>
-            </a:r>
-            <a:endParaRPr lang="en-US" sz="1200" dirty="0"/>
+              <a:t>担当者に</a:t>
+            </a:r>
+            <a:endParaRPr lang="en-US" sz="1050" dirty="0"/>
+          </a:p>
+          <a:p>
+            <a:pPr indent="0" marL="0">
+              <a:buNone/>
+            </a:pPr>
+            <a:r>
+              <a:rPr lang="en-US" sz="1050" b="1" dirty="0">
+                <a:solidFill>
+                  <a:srgbClr val="1E2A30"/>
+                </a:solidFill>
+                <a:latin typeface="Meiryo" pitchFamily="34" charset="0"/>
+                <a:ea typeface="Meiryo" pitchFamily="34" charset="-122"/>
+                <a:cs typeface="Meiryo" pitchFamily="34" charset="-120"/>
+              </a:rPr>
+              <a:t>名乗り直す</a:t>
+            </a:r>
+            <a:endParaRPr lang="en-US" sz="1050" dirty="0"/>
           </a:p>
         </p:txBody>
       </p:sp>
@@ -17122,8 +18093,8 @@
         </p:nvSpPr>
         <p:spPr>
           <a:xfrm>
-            <a:off x="4809744" y="1874520"/>
-            <a:ext cx="1645920" cy="777240"/>
+            <a:off x="3913632" y="1810512"/>
+            <a:ext cx="1316736" cy="822960"/>
           </a:xfrm>
           <a:prstGeom prst="rect">
             <a:avLst/>
@@ -17139,7 +18110,7 @@
               <a:buNone/>
             </a:pPr>
             <a:r>
-              <a:rPr lang="en-US" sz="950" dirty="0">
+              <a:rPr lang="en-US" sz="900" dirty="0">
                 <a:solidFill>
                   <a:srgbClr val="0B5563"/>
                 </a:solidFill>
@@ -17147,9 +18118,9 @@
                 <a:ea typeface="Meiryo" pitchFamily="34" charset="-122"/>
                 <a:cs typeface="Meiryo" pitchFamily="34" charset="-120"/>
               </a:rPr>
-              <a:t>「対象となる方の主な年齢層と、全体の人数は何名様でしょうか？」</a:t>
-            </a:r>
-            <a:endParaRPr lang="en-US" sz="950" dirty="0"/>
+              <a:t>「お電話代わっていただきありがとうございます！私、…相談センターと申します」</a:t>
+            </a:r>
+            <a:endParaRPr lang="en-US" sz="900" dirty="0"/>
           </a:p>
         </p:txBody>
       </p:sp>
@@ -17161,12 +18132,12 @@
         </p:nvSpPr>
         <p:spPr>
           <a:xfrm>
-            <a:off x="6766560" y="1234440"/>
-            <a:ext cx="1920240" cy="1463040"/>
+            <a:off x="5477256" y="1207008"/>
+            <a:ext cx="1536192" cy="1481328"/>
           </a:xfrm>
           <a:prstGeom prst="roundRect">
             <a:avLst>
-              <a:gd name="adj" fmla="val 5000"/>
+              <a:gd name="adj" fmla="val 4938"/>
             </a:avLst>
           </a:prstGeom>
           <a:solidFill>
@@ -17195,8 +18166,8 @@
         </p:nvSpPr>
         <p:spPr>
           <a:xfrm>
-            <a:off x="6894576" y="1362456"/>
-            <a:ext cx="384048" cy="384048"/>
+            <a:off x="5586984" y="1344168"/>
+            <a:ext cx="329184" cy="329184"/>
           </a:xfrm>
           <a:prstGeom prst="ellipse">
             <a:avLst/>
@@ -17220,8 +18191,8 @@
         </p:nvSpPr>
         <p:spPr>
           <a:xfrm>
-            <a:off x="6894576" y="1362456"/>
-            <a:ext cx="384048" cy="384048"/>
+            <a:off x="5586984" y="1344168"/>
+            <a:ext cx="329184" cy="329184"/>
           </a:xfrm>
           <a:prstGeom prst="rect">
             <a:avLst/>
@@ -17237,7 +18208,7 @@
               <a:buNone/>
             </a:pPr>
             <a:r>
-              <a:rPr lang="en-US" sz="1300" b="1" dirty="0">
+              <a:rPr lang="en-US" sz="1100" b="1" dirty="0">
                 <a:solidFill>
                   <a:srgbClr val="FFFFFF"/>
                 </a:solidFill>
@@ -17247,7 +18218,7 @@
               </a:rPr>
               <a:t>4</a:t>
             </a:r>
-            <a:endParaRPr lang="en-US" sz="1300" dirty="0"/>
+            <a:endParaRPr lang="en-US" sz="1100" dirty="0"/>
           </a:p>
         </p:txBody>
       </p:sp>
@@ -17259,8 +18230,8 @@
         </p:nvSpPr>
         <p:spPr>
           <a:xfrm>
-            <a:off x="7351776" y="1325880"/>
-            <a:ext cx="1261872" cy="457200"/>
+            <a:off x="5971032" y="1280160"/>
+            <a:ext cx="987552" cy="457200"/>
           </a:xfrm>
           <a:prstGeom prst="rect">
             <a:avLst/>
@@ -17276,7 +18247,7 @@
               <a:buNone/>
             </a:pPr>
             <a:r>
-              <a:rPr lang="en-US" sz="1200" b="1" dirty="0">
+              <a:rPr lang="en-US" sz="1050" b="1" dirty="0">
                 <a:solidFill>
                   <a:srgbClr val="1E2A30"/>
                 </a:solidFill>
@@ -17284,55 +18255,38 @@
                 <a:ea typeface="Meiryo" pitchFamily="34" charset="-122"/>
                 <a:cs typeface="Meiryo" pitchFamily="34" charset="-120"/>
               </a:rPr>
-              <a:t>決算月と</a:t>
-            </a:r>
-            <a:endParaRPr lang="en-US" sz="1200" dirty="0"/>
-          </a:p>
+              <a:t>用件を伝える</a:t>
+            </a:r>
+            <a:endParaRPr lang="en-US" sz="1050" dirty="0"/>
+          </a:p>
+        </p:txBody>
+      </p:sp>
+      <p:sp>
+        <p:nvSpPr>
+          <p:cNvPr id="25" name="Text 23"/>
+          <p:cNvSpPr txBox="1"/>
+          <p:nvPr/>
+        </p:nvSpPr>
+        <p:spPr>
+          <a:xfrm>
+            <a:off x="5586984" y="1810512"/>
+            <a:ext cx="1316736" cy="822960"/>
+          </a:xfrm>
+          <a:prstGeom prst="rect">
+            <a:avLst/>
+          </a:prstGeom>
+          <a:noFill/>
+          <a:ln/>
+        </p:spPr>
+        <p:txBody>
+          <a:bodyPr wrap="square" lIns="0" tIns="0" rIns="0" bIns="0" rtlCol="0" anchor="t"/>
+          <a:lstStyle/>
           <a:p>
             <a:pPr indent="0" marL="0">
               <a:buNone/>
             </a:pPr>
             <a:r>
-              <a:rPr lang="en-US" sz="1200" b="1" dirty="0">
-                <a:solidFill>
-                  <a:srgbClr val="1E2A30"/>
-                </a:solidFill>
-                <a:latin typeface="Meiryo" pitchFamily="34" charset="0"/>
-                <a:ea typeface="Meiryo" pitchFamily="34" charset="-122"/>
-                <a:cs typeface="Meiryo" pitchFamily="34" charset="-120"/>
-              </a:rPr>
-              <a:t>メールを聞く</a:t>
-            </a:r>
-            <a:endParaRPr lang="en-US" sz="1200" dirty="0"/>
-          </a:p>
-        </p:txBody>
-      </p:sp>
-      <p:sp>
-        <p:nvSpPr>
-          <p:cNvPr id="25" name="Text 23"/>
-          <p:cNvSpPr txBox="1"/>
-          <p:nvPr/>
-        </p:nvSpPr>
-        <p:spPr>
-          <a:xfrm>
-            <a:off x="6912864" y="1874520"/>
-            <a:ext cx="1645920" cy="777240"/>
-          </a:xfrm>
-          <a:prstGeom prst="rect">
-            <a:avLst/>
-          </a:prstGeom>
-          <a:noFill/>
-          <a:ln/>
-        </p:spPr>
-        <p:txBody>
-          <a:bodyPr wrap="square" lIns="0" tIns="0" rIns="0" bIns="0" rtlCol="0" anchor="t"/>
-          <a:lstStyle/>
-          <a:p>
-            <a:pPr indent="0" marL="0">
-              <a:buNone/>
-            </a:pPr>
-            <a:r>
-              <a:rPr lang="en-US" sz="950" dirty="0">
+              <a:rPr lang="en-US" sz="900" dirty="0">
                 <a:solidFill>
                   <a:srgbClr val="0B5563"/>
                 </a:solidFill>
@@ -17340,9 +18294,9 @@
                 <a:ea typeface="Meiryo" pitchFamily="34" charset="-122"/>
                 <a:cs typeface="Meiryo" pitchFamily="34" charset="-120"/>
               </a:rPr>
-              <a:t>「シミュレーション資料をお送りしたいので、決算月とメールアドレスを…」</a:t>
-            </a:r>
-            <a:endParaRPr lang="en-US" sz="950" dirty="0"/>
+              <a:t>「今回の法改正で、事業主様の節税効果などのメリットが大きくなっております」</a:t>
+            </a:r>
+            <a:endParaRPr lang="en-US" sz="900" dirty="0"/>
           </a:p>
         </p:txBody>
       </p:sp>
@@ -17354,12 +18308,12 @@
         </p:nvSpPr>
         <p:spPr>
           <a:xfrm>
-            <a:off x="457200" y="2852928"/>
-            <a:ext cx="1920240" cy="1463040"/>
+            <a:off x="7150608" y="1207008"/>
+            <a:ext cx="1536192" cy="1481328"/>
           </a:xfrm>
           <a:prstGeom prst="roundRect">
             <a:avLst>
-              <a:gd name="adj" fmla="val 5000"/>
+              <a:gd name="adj" fmla="val 4938"/>
             </a:avLst>
           </a:prstGeom>
           <a:solidFill>
@@ -17388,8 +18342,8 @@
         </p:nvSpPr>
         <p:spPr>
           <a:xfrm>
-            <a:off x="585216" y="2980944"/>
-            <a:ext cx="384048" cy="384048"/>
+            <a:off x="7260336" y="1344168"/>
+            <a:ext cx="329184" cy="329184"/>
           </a:xfrm>
           <a:prstGeom prst="ellipse">
             <a:avLst/>
@@ -17413,8 +18367,8 @@
         </p:nvSpPr>
         <p:spPr>
           <a:xfrm>
-            <a:off x="585216" y="2980944"/>
-            <a:ext cx="384048" cy="384048"/>
+            <a:off x="7260336" y="1344168"/>
+            <a:ext cx="329184" cy="329184"/>
           </a:xfrm>
           <a:prstGeom prst="rect">
             <a:avLst/>
@@ -17430,7 +18384,7 @@
               <a:buNone/>
             </a:pPr>
             <a:r>
-              <a:rPr lang="en-US" sz="1300" b="1" dirty="0">
+              <a:rPr lang="en-US" sz="1100" b="1" dirty="0">
                 <a:solidFill>
                   <a:srgbClr val="FFFFFF"/>
                 </a:solidFill>
@@ -17440,7 +18394,7 @@
               </a:rPr>
               <a:t>5</a:t>
             </a:r>
-            <a:endParaRPr lang="en-US" sz="1300" dirty="0"/>
+            <a:endParaRPr lang="en-US" sz="1100" dirty="0"/>
           </a:p>
         </p:txBody>
       </p:sp>
@@ -17452,8 +18406,8 @@
         </p:nvSpPr>
         <p:spPr>
           <a:xfrm>
-            <a:off x="1042416" y="2944368"/>
-            <a:ext cx="1261872" cy="457200"/>
+            <a:off x="7644384" y="1280160"/>
+            <a:ext cx="987552" cy="457200"/>
           </a:xfrm>
           <a:prstGeom prst="rect">
             <a:avLst/>
@@ -17469,7 +18423,7 @@
               <a:buNone/>
             </a:pPr>
             <a:r>
-              <a:rPr lang="en-US" sz="1200" b="1" dirty="0">
+              <a:rPr lang="en-US" sz="1050" b="1" dirty="0">
                 <a:solidFill>
                   <a:srgbClr val="1E2A30"/>
                 </a:solidFill>
@@ -17477,16 +18431,16 @@
                 <a:ea typeface="Meiryo" pitchFamily="34" charset="-122"/>
                 <a:cs typeface="Meiryo" pitchFamily="34" charset="-120"/>
               </a:rPr>
-              <a:t>商談の</a:t>
-            </a:r>
-            <a:endParaRPr lang="en-US" sz="1200" dirty="0"/>
+              <a:t>年齢と人数を</a:t>
+            </a:r>
+            <a:endParaRPr lang="en-US" sz="1050" dirty="0"/>
           </a:p>
           <a:p>
             <a:pPr indent="0" marL="0">
               <a:buNone/>
             </a:pPr>
             <a:r>
-              <a:rPr lang="en-US" sz="1200" b="1" dirty="0">
+              <a:rPr lang="en-US" sz="1050" b="1" dirty="0">
                 <a:solidFill>
                   <a:srgbClr val="1E2A30"/>
                 </a:solidFill>
@@ -17494,9 +18448,9 @@
                 <a:ea typeface="Meiryo" pitchFamily="34" charset="-122"/>
                 <a:cs typeface="Meiryo" pitchFamily="34" charset="-120"/>
               </a:rPr>
-              <a:t>日時を決める</a:t>
-            </a:r>
-            <a:endParaRPr lang="en-US" sz="1200" dirty="0"/>
+              <a:t>聞く</a:t>
+            </a:r>
+            <a:endParaRPr lang="en-US" sz="1050" dirty="0"/>
           </a:p>
         </p:txBody>
       </p:sp>
@@ -17508,8 +18462,8 @@
         </p:nvSpPr>
         <p:spPr>
           <a:xfrm>
-            <a:off x="603504" y="3493008"/>
-            <a:ext cx="1645920" cy="777240"/>
+            <a:off x="7260336" y="1810512"/>
+            <a:ext cx="1316736" cy="822960"/>
           </a:xfrm>
           <a:prstGeom prst="rect">
             <a:avLst/>
@@ -17525,7 +18479,7 @@
               <a:buNone/>
             </a:pPr>
             <a:r>
-              <a:rPr lang="en-US" sz="950" dirty="0">
+              <a:rPr lang="en-US" sz="900" dirty="0">
                 <a:solidFill>
                   <a:srgbClr val="0B5563"/>
                 </a:solidFill>
@@ -17533,9 +18487,9 @@
                 <a:ea typeface="Meiryo" pitchFamily="34" charset="-122"/>
                 <a:cs typeface="Meiryo" pitchFamily="34" charset="-120"/>
               </a:rPr>
-              <a:t>「15分ほどオンラインで。来週の水曜日14時頃はいかがでしょうか？」</a:t>
-            </a:r>
-            <a:endParaRPr lang="en-US" sz="950" dirty="0"/>
+              <a:t>「対象となる方の年齢層と、全体の人数は何名様でしょうか？」</a:t>
+            </a:r>
+            <a:endParaRPr lang="en-US" sz="900" dirty="0"/>
           </a:p>
         </p:txBody>
       </p:sp>
@@ -17547,12 +18501,12 @@
         </p:nvSpPr>
         <p:spPr>
           <a:xfrm>
-            <a:off x="2560320" y="2852928"/>
-            <a:ext cx="1920240" cy="1463040"/>
+            <a:off x="457200" y="2807208"/>
+            <a:ext cx="1536192" cy="1481328"/>
           </a:xfrm>
           <a:prstGeom prst="roundRect">
             <a:avLst>
-              <a:gd name="adj" fmla="val 5000"/>
+              <a:gd name="adj" fmla="val 4938"/>
             </a:avLst>
           </a:prstGeom>
           <a:solidFill>
@@ -17581,8 +18535,8 @@
         </p:nvSpPr>
         <p:spPr>
           <a:xfrm>
-            <a:off x="2688336" y="2980944"/>
-            <a:ext cx="384048" cy="384048"/>
+            <a:off x="566928" y="2944368"/>
+            <a:ext cx="329184" cy="329184"/>
           </a:xfrm>
           <a:prstGeom prst="ellipse">
             <a:avLst/>
@@ -17606,8 +18560,8 @@
         </p:nvSpPr>
         <p:spPr>
           <a:xfrm>
-            <a:off x="2688336" y="2980944"/>
-            <a:ext cx="384048" cy="384048"/>
+            <a:off x="566928" y="2944368"/>
+            <a:ext cx="329184" cy="329184"/>
           </a:xfrm>
           <a:prstGeom prst="rect">
             <a:avLst/>
@@ -17623,7 +18577,7 @@
               <a:buNone/>
             </a:pPr>
             <a:r>
-              <a:rPr lang="en-US" sz="1300" b="1" dirty="0">
+              <a:rPr lang="en-US" sz="1100" b="1" dirty="0">
                 <a:solidFill>
                   <a:srgbClr val="FFFFFF"/>
                 </a:solidFill>
@@ -17633,7 +18587,7 @@
               </a:rPr>
               <a:t>6</a:t>
             </a:r>
-            <a:endParaRPr lang="en-US" sz="1300" dirty="0"/>
+            <a:endParaRPr lang="en-US" sz="1100" dirty="0"/>
           </a:p>
         </p:txBody>
       </p:sp>
@@ -17645,8 +18599,8 @@
         </p:nvSpPr>
         <p:spPr>
           <a:xfrm>
-            <a:off x="3145536" y="2944368"/>
-            <a:ext cx="1261872" cy="457200"/>
+            <a:off x="950976" y="2880360"/>
+            <a:ext cx="987552" cy="457200"/>
           </a:xfrm>
           <a:prstGeom prst="rect">
             <a:avLst/>
@@ -17662,7 +18616,7 @@
               <a:buNone/>
             </a:pPr>
             <a:r>
-              <a:rPr lang="en-US" sz="1200" b="1" dirty="0">
+              <a:rPr lang="en-US" sz="1050" b="1" dirty="0">
                 <a:solidFill>
                   <a:srgbClr val="1E2A30"/>
                 </a:solidFill>
@@ -17670,9 +18624,26 @@
                 <a:ea typeface="Meiryo" pitchFamily="34" charset="-122"/>
                 <a:cs typeface="Meiryo" pitchFamily="34" charset="-120"/>
               </a:rPr>
-              <a:t>残りの質問と確認</a:t>
-            </a:r>
-            <a:endParaRPr lang="en-US" sz="1200" dirty="0"/>
+              <a:t>決算月と</a:t>
+            </a:r>
+            <a:endParaRPr lang="en-US" sz="1050" dirty="0"/>
+          </a:p>
+          <a:p>
+            <a:pPr indent="0" marL="0">
+              <a:buNone/>
+            </a:pPr>
+            <a:r>
+              <a:rPr lang="en-US" sz="1050" b="1" dirty="0">
+                <a:solidFill>
+                  <a:srgbClr val="1E2A30"/>
+                </a:solidFill>
+                <a:latin typeface="Meiryo" pitchFamily="34" charset="0"/>
+                <a:ea typeface="Meiryo" pitchFamily="34" charset="-122"/>
+                <a:cs typeface="Meiryo" pitchFamily="34" charset="-120"/>
+              </a:rPr>
+              <a:t>メールを聞く</a:t>
+            </a:r>
+            <a:endParaRPr lang="en-US" sz="1050" dirty="0"/>
           </a:p>
         </p:txBody>
       </p:sp>
@@ -17684,8 +18655,8 @@
         </p:nvSpPr>
         <p:spPr>
           <a:xfrm>
-            <a:off x="2706624" y="3493008"/>
-            <a:ext cx="1645920" cy="777240"/>
+            <a:off x="566928" y="3410712"/>
+            <a:ext cx="1316736" cy="822960"/>
           </a:xfrm>
           <a:prstGeom prst="rect">
             <a:avLst/>
@@ -17701,17 +18672,17 @@
               <a:buNone/>
             </a:pPr>
             <a:r>
-              <a:rPr lang="en-US" sz="950" dirty="0">
-                <a:solidFill>
-                  <a:srgbClr val="1E2A30"/>
-                </a:solidFill>
-                <a:latin typeface="Meiryo" pitchFamily="34" charset="0"/>
-                <a:ea typeface="Meiryo" pitchFamily="34" charset="-122"/>
-                <a:cs typeface="Meiryo" pitchFamily="34" charset="-120"/>
-              </a:rPr>
-              <a:t>投資・退職金制度・決める方を質問。メールアドレスを復唱し、前日連絡の時間帯も</a:t>
-            </a:r>
-            <a:endParaRPr lang="en-US" sz="950" dirty="0"/>
+              <a:rPr lang="en-US" sz="900" dirty="0">
+                <a:solidFill>
+                  <a:srgbClr val="0B5563"/>
+                </a:solidFill>
+                <a:latin typeface="Meiryo" pitchFamily="34" charset="0"/>
+                <a:ea typeface="Meiryo" pitchFamily="34" charset="-122"/>
+                <a:cs typeface="Meiryo" pitchFamily="34" charset="-120"/>
+              </a:rPr>
+              <a:t>「シミュレーション資料をお送りしたいので、決算月とメールアドレスを…」</a:t>
+            </a:r>
+            <a:endParaRPr lang="en-US" sz="900" dirty="0"/>
           </a:p>
         </p:txBody>
       </p:sp>
@@ -17723,12 +18694,12 @@
         </p:nvSpPr>
         <p:spPr>
           <a:xfrm>
-            <a:off x="4663440" y="2852928"/>
-            <a:ext cx="1920240" cy="1463040"/>
+            <a:off x="2130552" y="2807208"/>
+            <a:ext cx="1536192" cy="1481328"/>
           </a:xfrm>
           <a:prstGeom prst="roundRect">
             <a:avLst>
-              <a:gd name="adj" fmla="val 5000"/>
+              <a:gd name="adj" fmla="val 4938"/>
             </a:avLst>
           </a:prstGeom>
           <a:solidFill>
@@ -17757,8 +18728,8 @@
         </p:nvSpPr>
         <p:spPr>
           <a:xfrm>
-            <a:off x="4791456" y="2980944"/>
-            <a:ext cx="384048" cy="384048"/>
+            <a:off x="2240280" y="2944368"/>
+            <a:ext cx="329184" cy="329184"/>
           </a:xfrm>
           <a:prstGeom prst="ellipse">
             <a:avLst/>
@@ -17782,8 +18753,8 @@
         </p:nvSpPr>
         <p:spPr>
           <a:xfrm>
-            <a:off x="4791456" y="2980944"/>
-            <a:ext cx="384048" cy="384048"/>
+            <a:off x="2240280" y="2944368"/>
+            <a:ext cx="329184" cy="329184"/>
           </a:xfrm>
           <a:prstGeom prst="rect">
             <a:avLst/>
@@ -17799,7 +18770,7 @@
               <a:buNone/>
             </a:pPr>
             <a:r>
-              <a:rPr lang="en-US" sz="1300" b="1" dirty="0">
+              <a:rPr lang="en-US" sz="1100" b="1" dirty="0">
                 <a:solidFill>
                   <a:srgbClr val="FFFFFF"/>
                 </a:solidFill>
@@ -17809,7 +18780,7 @@
               </a:rPr>
               <a:t>7</a:t>
             </a:r>
-            <a:endParaRPr lang="en-US" sz="1300" dirty="0"/>
+            <a:endParaRPr lang="en-US" sz="1100" dirty="0"/>
           </a:p>
         </p:txBody>
       </p:sp>
@@ -17821,8 +18792,8 @@
         </p:nvSpPr>
         <p:spPr>
           <a:xfrm>
-            <a:off x="5248656" y="2944368"/>
-            <a:ext cx="1261872" cy="457200"/>
+            <a:off x="2624328" y="2880360"/>
+            <a:ext cx="987552" cy="457200"/>
           </a:xfrm>
           <a:prstGeom prst="rect">
             <a:avLst/>
@@ -17838,7 +18809,7 @@
               <a:buNone/>
             </a:pPr>
             <a:r>
-              <a:rPr lang="en-US" sz="1200" b="1" dirty="0">
+              <a:rPr lang="en-US" sz="1050" b="1" dirty="0">
                 <a:solidFill>
                   <a:srgbClr val="1E2A30"/>
                 </a:solidFill>
@@ -17846,16 +18817,16 @@
                 <a:ea typeface="Meiryo" pitchFamily="34" charset="-122"/>
                 <a:cs typeface="Meiryo" pitchFamily="34" charset="-120"/>
               </a:rPr>
-              <a:t>カレンダー</a:t>
-            </a:r>
-            <a:endParaRPr lang="en-US" sz="1200" dirty="0"/>
+              <a:t>商談の</a:t>
+            </a:r>
+            <a:endParaRPr lang="en-US" sz="1050" dirty="0"/>
           </a:p>
           <a:p>
             <a:pPr indent="0" marL="0">
               <a:buNone/>
             </a:pPr>
             <a:r>
-              <a:rPr lang="en-US" sz="1200" b="1" dirty="0">
+              <a:rPr lang="en-US" sz="1050" b="1" dirty="0">
                 <a:solidFill>
                   <a:srgbClr val="1E2A30"/>
                 </a:solidFill>
@@ -17863,9 +18834,9 @@
                 <a:ea typeface="Meiryo" pitchFamily="34" charset="-122"/>
                 <a:cs typeface="Meiryo" pitchFamily="34" charset="-120"/>
               </a:rPr>
-              <a:t>登録をお願い</a:t>
-            </a:r>
-            <a:endParaRPr lang="en-US" sz="1200" dirty="0"/>
+              <a:t>日時を決める</a:t>
+            </a:r>
+            <a:endParaRPr lang="en-US" sz="1050" dirty="0"/>
           </a:p>
         </p:txBody>
       </p:sp>
@@ -17877,8 +18848,8 @@
         </p:nvSpPr>
         <p:spPr>
           <a:xfrm>
-            <a:off x="4809744" y="3493008"/>
-            <a:ext cx="1645920" cy="777240"/>
+            <a:off x="2240280" y="3410712"/>
+            <a:ext cx="1316736" cy="822960"/>
           </a:xfrm>
           <a:prstGeom prst="rect">
             <a:avLst/>
@@ -17894,7 +18865,7 @@
               <a:buNone/>
             </a:pPr>
             <a:r>
-              <a:rPr lang="en-US" sz="950" dirty="0">
+              <a:rPr lang="en-US" sz="900" dirty="0">
                 <a:solidFill>
                   <a:srgbClr val="0B5563"/>
                 </a:solidFill>
@@ -17902,9 +18873,9 @@
                 <a:ea typeface="Meiryo" pitchFamily="34" charset="-122"/>
                 <a:cs typeface="Meiryo" pitchFamily="34" charset="-120"/>
               </a:rPr>
-              <a:t>「一旦カレンダーにご予定だけ入れておいていただけますと助かります」</a:t>
-            </a:r>
-            <a:endParaRPr lang="en-US" sz="950" dirty="0"/>
+              <a:t>「15分ほどオンラインで。来週の水曜日14時頃はいかがでしょうか？」</a:t>
+            </a:r>
+            <a:endParaRPr lang="en-US" sz="900" dirty="0"/>
           </a:p>
         </p:txBody>
       </p:sp>
@@ -17916,12 +18887,398 @@
         </p:nvSpPr>
         <p:spPr>
           <a:xfrm>
-            <a:off x="6766560" y="2852928"/>
-            <a:ext cx="1920240" cy="1463040"/>
+            <a:off x="3803904" y="2807208"/>
+            <a:ext cx="1536192" cy="1481328"/>
           </a:xfrm>
           <a:prstGeom prst="roundRect">
             <a:avLst>
-              <a:gd name="adj" fmla="val 5000"/>
+              <a:gd name="adj" fmla="val 4938"/>
+            </a:avLst>
+          </a:prstGeom>
+          <a:solidFill>
+            <a:srgbClr val="FFFFFF"/>
+          </a:solidFill>
+          <a:ln w="9525">
+            <a:solidFill>
+              <a:srgbClr val="D5DDE0"/>
+            </a:solidFill>
+            <a:prstDash val="solid"/>
+          </a:ln>
+          <a:effectLst>
+            <a:outerShdw sx="100000" sy="100000" kx="0" ky="0" algn="bl" rotWithShape="0" blurRad="76200" dist="25400" dir="5400000">
+              <a:srgbClr val="000000">
+                <a:alpha val="12000"/>
+              </a:srgbClr>
+            </a:outerShdw>
+          </a:effectLst>
+        </p:spPr>
+      </p:sp>
+      <p:sp>
+        <p:nvSpPr>
+          <p:cNvPr id="42" name="Shape 40"/>
+          <p:cNvSpPr/>
+          <p:nvPr/>
+        </p:nvSpPr>
+        <p:spPr>
+          <a:xfrm>
+            <a:off x="3913632" y="2944368"/>
+            <a:ext cx="329184" cy="329184"/>
+          </a:xfrm>
+          <a:prstGeom prst="ellipse">
+            <a:avLst/>
+          </a:prstGeom>
+          <a:solidFill>
+            <a:srgbClr val="0B6E6E"/>
+          </a:solidFill>
+          <a:ln w="19050">
+            <a:solidFill>
+              <a:srgbClr val="FFFFFF"/>
+            </a:solidFill>
+            <a:prstDash val="solid"/>
+          </a:ln>
+        </p:spPr>
+      </p:sp>
+      <p:sp>
+        <p:nvSpPr>
+          <p:cNvPr id="43" name="Text 41"/>
+          <p:cNvSpPr txBox="1"/>
+          <p:nvPr/>
+        </p:nvSpPr>
+        <p:spPr>
+          <a:xfrm>
+            <a:off x="3913632" y="2944368"/>
+            <a:ext cx="329184" cy="329184"/>
+          </a:xfrm>
+          <a:prstGeom prst="rect">
+            <a:avLst/>
+          </a:prstGeom>
+          <a:noFill/>
+          <a:ln/>
+        </p:spPr>
+        <p:txBody>
+          <a:bodyPr wrap="square" lIns="0" tIns="0" rIns="0" bIns="0" rtlCol="0" anchor="ctr"/>
+          <a:lstStyle/>
+          <a:p>
+            <a:pPr algn="ctr" indent="0" marL="0">
+              <a:buNone/>
+            </a:pPr>
+            <a:r>
+              <a:rPr lang="en-US" sz="1100" b="1" dirty="0">
+                <a:solidFill>
+                  <a:srgbClr val="FFFFFF"/>
+                </a:solidFill>
+                <a:latin typeface="Meiryo" pitchFamily="34" charset="0"/>
+                <a:ea typeface="Meiryo" pitchFamily="34" charset="-122"/>
+                <a:cs typeface="Meiryo" pitchFamily="34" charset="-120"/>
+              </a:rPr>
+              <a:t>8</a:t>
+            </a:r>
+            <a:endParaRPr lang="en-US" sz="1100" dirty="0"/>
+          </a:p>
+        </p:txBody>
+      </p:sp>
+      <p:sp>
+        <p:nvSpPr>
+          <p:cNvPr id="44" name="Text 42"/>
+          <p:cNvSpPr txBox="1"/>
+          <p:nvPr/>
+        </p:nvSpPr>
+        <p:spPr>
+          <a:xfrm>
+            <a:off x="4297680" y="2880360"/>
+            <a:ext cx="987552" cy="457200"/>
+          </a:xfrm>
+          <a:prstGeom prst="rect">
+            <a:avLst/>
+          </a:prstGeom>
+          <a:noFill/>
+          <a:ln/>
+        </p:spPr>
+        <p:txBody>
+          <a:bodyPr wrap="square" lIns="0" tIns="0" rIns="0" bIns="0" rtlCol="0" anchor="ctr"/>
+          <a:lstStyle/>
+          <a:p>
+            <a:pPr indent="0" marL="0">
+              <a:buNone/>
+            </a:pPr>
+            <a:r>
+              <a:rPr lang="en-US" sz="1050" b="1" dirty="0">
+                <a:solidFill>
+                  <a:srgbClr val="1E2A30"/>
+                </a:solidFill>
+                <a:latin typeface="Meiryo" pitchFamily="34" charset="0"/>
+                <a:ea typeface="Meiryo" pitchFamily="34" charset="-122"/>
+                <a:cs typeface="Meiryo" pitchFamily="34" charset="-120"/>
+              </a:rPr>
+              <a:t>残りの質問と</a:t>
+            </a:r>
+            <a:endParaRPr lang="en-US" sz="1050" dirty="0"/>
+          </a:p>
+          <a:p>
+            <a:pPr indent="0" marL="0">
+              <a:buNone/>
+            </a:pPr>
+            <a:r>
+              <a:rPr lang="en-US" sz="1050" b="1" dirty="0">
+                <a:solidFill>
+                  <a:srgbClr val="1E2A30"/>
+                </a:solidFill>
+                <a:latin typeface="Meiryo" pitchFamily="34" charset="0"/>
+                <a:ea typeface="Meiryo" pitchFamily="34" charset="-122"/>
+                <a:cs typeface="Meiryo" pitchFamily="34" charset="-120"/>
+              </a:rPr>
+              <a:t>確認</a:t>
+            </a:r>
+            <a:endParaRPr lang="en-US" sz="1050" dirty="0"/>
+          </a:p>
+        </p:txBody>
+      </p:sp>
+      <p:sp>
+        <p:nvSpPr>
+          <p:cNvPr id="45" name="Text 43"/>
+          <p:cNvSpPr txBox="1"/>
+          <p:nvPr/>
+        </p:nvSpPr>
+        <p:spPr>
+          <a:xfrm>
+            <a:off x="3913632" y="3410712"/>
+            <a:ext cx="1316736" cy="822960"/>
+          </a:xfrm>
+          <a:prstGeom prst="rect">
+            <a:avLst/>
+          </a:prstGeom>
+          <a:noFill/>
+          <a:ln/>
+        </p:spPr>
+        <p:txBody>
+          <a:bodyPr wrap="square" lIns="0" tIns="0" rIns="0" bIns="0" rtlCol="0" anchor="t"/>
+          <a:lstStyle/>
+          <a:p>
+            <a:pPr indent="0" marL="0">
+              <a:buNone/>
+            </a:pPr>
+            <a:r>
+              <a:rPr lang="en-US" sz="900" dirty="0">
+                <a:solidFill>
+                  <a:srgbClr val="1E2A30"/>
+                </a:solidFill>
+                <a:latin typeface="Meiryo" pitchFamily="34" charset="0"/>
+                <a:ea typeface="Meiryo" pitchFamily="34" charset="-122"/>
+                <a:cs typeface="Meiryo" pitchFamily="34" charset="-120"/>
+              </a:rPr>
+              <a:t>投資・退職金制度・決める方を質問。メールを復唱し、前日連絡の時間帯も</a:t>
+            </a:r>
+            <a:endParaRPr lang="en-US" sz="900" dirty="0"/>
+          </a:p>
+        </p:txBody>
+      </p:sp>
+      <p:sp>
+        <p:nvSpPr>
+          <p:cNvPr id="46" name="Shape 44"/>
+          <p:cNvSpPr/>
+          <p:nvPr/>
+        </p:nvSpPr>
+        <p:spPr>
+          <a:xfrm>
+            <a:off x="5477256" y="2807208"/>
+            <a:ext cx="1536192" cy="1481328"/>
+          </a:xfrm>
+          <a:prstGeom prst="roundRect">
+            <a:avLst>
+              <a:gd name="adj" fmla="val 4938"/>
+            </a:avLst>
+          </a:prstGeom>
+          <a:solidFill>
+            <a:srgbClr val="FFFFFF"/>
+          </a:solidFill>
+          <a:ln w="9525">
+            <a:solidFill>
+              <a:srgbClr val="D5DDE0"/>
+            </a:solidFill>
+            <a:prstDash val="solid"/>
+          </a:ln>
+          <a:effectLst>
+            <a:outerShdw sx="100000" sy="100000" kx="0" ky="0" algn="bl" rotWithShape="0" blurRad="76200" dist="25400" dir="5400000">
+              <a:srgbClr val="000000">
+                <a:alpha val="12000"/>
+              </a:srgbClr>
+            </a:outerShdw>
+          </a:effectLst>
+        </p:spPr>
+      </p:sp>
+      <p:sp>
+        <p:nvSpPr>
+          <p:cNvPr id="47" name="Shape 45"/>
+          <p:cNvSpPr/>
+          <p:nvPr/>
+        </p:nvSpPr>
+        <p:spPr>
+          <a:xfrm>
+            <a:off x="5586984" y="2944368"/>
+            <a:ext cx="329184" cy="329184"/>
+          </a:xfrm>
+          <a:prstGeom prst="ellipse">
+            <a:avLst/>
+          </a:prstGeom>
+          <a:solidFill>
+            <a:srgbClr val="0B6E6E"/>
+          </a:solidFill>
+          <a:ln w="19050">
+            <a:solidFill>
+              <a:srgbClr val="FFFFFF"/>
+            </a:solidFill>
+            <a:prstDash val="solid"/>
+          </a:ln>
+        </p:spPr>
+      </p:sp>
+      <p:sp>
+        <p:nvSpPr>
+          <p:cNvPr id="48" name="Text 46"/>
+          <p:cNvSpPr txBox="1"/>
+          <p:nvPr/>
+        </p:nvSpPr>
+        <p:spPr>
+          <a:xfrm>
+            <a:off x="5586984" y="2944368"/>
+            <a:ext cx="329184" cy="329184"/>
+          </a:xfrm>
+          <a:prstGeom prst="rect">
+            <a:avLst/>
+          </a:prstGeom>
+          <a:noFill/>
+          <a:ln/>
+        </p:spPr>
+        <p:txBody>
+          <a:bodyPr wrap="square" lIns="0" tIns="0" rIns="0" bIns="0" rtlCol="0" anchor="ctr"/>
+          <a:lstStyle/>
+          <a:p>
+            <a:pPr algn="ctr" indent="0" marL="0">
+              <a:buNone/>
+            </a:pPr>
+            <a:r>
+              <a:rPr lang="en-US" sz="1100" b="1" dirty="0">
+                <a:solidFill>
+                  <a:srgbClr val="FFFFFF"/>
+                </a:solidFill>
+                <a:latin typeface="Meiryo" pitchFamily="34" charset="0"/>
+                <a:ea typeface="Meiryo" pitchFamily="34" charset="-122"/>
+                <a:cs typeface="Meiryo" pitchFamily="34" charset="-120"/>
+              </a:rPr>
+              <a:t>9</a:t>
+            </a:r>
+            <a:endParaRPr lang="en-US" sz="1100" dirty="0"/>
+          </a:p>
+        </p:txBody>
+      </p:sp>
+      <p:sp>
+        <p:nvSpPr>
+          <p:cNvPr id="49" name="Text 47"/>
+          <p:cNvSpPr txBox="1"/>
+          <p:nvPr/>
+        </p:nvSpPr>
+        <p:spPr>
+          <a:xfrm>
+            <a:off x="5971032" y="2880360"/>
+            <a:ext cx="987552" cy="457200"/>
+          </a:xfrm>
+          <a:prstGeom prst="rect">
+            <a:avLst/>
+          </a:prstGeom>
+          <a:noFill/>
+          <a:ln/>
+        </p:spPr>
+        <p:txBody>
+          <a:bodyPr wrap="square" lIns="0" tIns="0" rIns="0" bIns="0" rtlCol="0" anchor="ctr"/>
+          <a:lstStyle/>
+          <a:p>
+            <a:pPr indent="0" marL="0">
+              <a:buNone/>
+            </a:pPr>
+            <a:r>
+              <a:rPr lang="en-US" sz="1050" b="1" dirty="0">
+                <a:solidFill>
+                  <a:srgbClr val="1E2A30"/>
+                </a:solidFill>
+                <a:latin typeface="Meiryo" pitchFamily="34" charset="0"/>
+                <a:ea typeface="Meiryo" pitchFamily="34" charset="-122"/>
+                <a:cs typeface="Meiryo" pitchFamily="34" charset="-120"/>
+              </a:rPr>
+              <a:t>カレンダー</a:t>
+            </a:r>
+            <a:endParaRPr lang="en-US" sz="1050" dirty="0"/>
+          </a:p>
+          <a:p>
+            <a:pPr indent="0" marL="0">
+              <a:buNone/>
+            </a:pPr>
+            <a:r>
+              <a:rPr lang="en-US" sz="1050" b="1" dirty="0">
+                <a:solidFill>
+                  <a:srgbClr val="1E2A30"/>
+                </a:solidFill>
+                <a:latin typeface="Meiryo" pitchFamily="34" charset="0"/>
+                <a:ea typeface="Meiryo" pitchFamily="34" charset="-122"/>
+                <a:cs typeface="Meiryo" pitchFamily="34" charset="-120"/>
+              </a:rPr>
+              <a:t>登録をお願い</a:t>
+            </a:r>
+            <a:endParaRPr lang="en-US" sz="1050" dirty="0"/>
+          </a:p>
+        </p:txBody>
+      </p:sp>
+      <p:sp>
+        <p:nvSpPr>
+          <p:cNvPr id="50" name="Text 48"/>
+          <p:cNvSpPr txBox="1"/>
+          <p:nvPr/>
+        </p:nvSpPr>
+        <p:spPr>
+          <a:xfrm>
+            <a:off x="5586984" y="3410712"/>
+            <a:ext cx="1316736" cy="822960"/>
+          </a:xfrm>
+          <a:prstGeom prst="rect">
+            <a:avLst/>
+          </a:prstGeom>
+          <a:noFill/>
+          <a:ln/>
+        </p:spPr>
+        <p:txBody>
+          <a:bodyPr wrap="square" lIns="0" tIns="0" rIns="0" bIns="0" rtlCol="0" anchor="t"/>
+          <a:lstStyle/>
+          <a:p>
+            <a:pPr indent="0" marL="0">
+              <a:buNone/>
+            </a:pPr>
+            <a:r>
+              <a:rPr lang="en-US" sz="900" dirty="0">
+                <a:solidFill>
+                  <a:srgbClr val="0B5563"/>
+                </a:solidFill>
+                <a:latin typeface="Meiryo" pitchFamily="34" charset="0"/>
+                <a:ea typeface="Meiryo" pitchFamily="34" charset="-122"/>
+                <a:cs typeface="Meiryo" pitchFamily="34" charset="-120"/>
+              </a:rPr>
+              <a:t>「一旦カレンダーにご予定だけ入れておいていただけますと助かります」</a:t>
+            </a:r>
+            <a:endParaRPr lang="en-US" sz="900" dirty="0"/>
+          </a:p>
+        </p:txBody>
+      </p:sp>
+      <p:sp>
+        <p:nvSpPr>
+          <p:cNvPr id="51" name="Shape 49"/>
+          <p:cNvSpPr/>
+          <p:nvPr/>
+        </p:nvSpPr>
+        <p:spPr>
+          <a:xfrm>
+            <a:off x="7150608" y="2807208"/>
+            <a:ext cx="1536192" cy="1481328"/>
+          </a:xfrm>
+          <a:prstGeom prst="roundRect">
+            <a:avLst>
+              <a:gd name="adj" fmla="val 4938"/>
             </a:avLst>
           </a:prstGeom>
           <a:solidFill>
@@ -17937,7 +19294,7 @@
       </p:sp>
       <p:pic>
         <p:nvPicPr>
-          <p:cNvPr id="42" name="Image 0" descr="preencoded.png">    </p:cNvPr>
+          <p:cNvPr id="52" name="Image 0" descr="preencoded.png">    </p:cNvPr>
           <p:cNvPicPr>
             <a:picLocks noChangeAspect="1"/>
           </p:cNvPicPr>
@@ -17951,8 +19308,8 @@
         </p:blipFill>
         <p:spPr>
           <a:xfrm>
-            <a:off x="6931152" y="2999232"/>
-            <a:ext cx="384048" cy="384048"/>
+            <a:off x="7278624" y="2953512"/>
+            <a:ext cx="329184" cy="329184"/>
           </a:xfrm>
           <a:prstGeom prst="rect">
             <a:avLst/>
@@ -17961,14 +19318,14 @@
       </p:pic>
       <p:sp>
         <p:nvSpPr>
-          <p:cNvPr id="43" name="Text 40"/>
-          <p:cNvSpPr txBox="1"/>
-          <p:nvPr/>
-        </p:nvSpPr>
-        <p:spPr>
-          <a:xfrm>
-            <a:off x="7388352" y="2944368"/>
-            <a:ext cx="1234440" cy="457200"/>
+          <p:cNvPr id="53" name="Text 50"/>
+          <p:cNvSpPr txBox="1"/>
+          <p:nvPr/>
+        </p:nvSpPr>
+        <p:spPr>
+          <a:xfrm>
+            <a:off x="7680960" y="2880360"/>
+            <a:ext cx="950976" cy="457200"/>
           </a:xfrm>
           <a:prstGeom prst="rect">
             <a:avLst/>
@@ -17984,7 +19341,7 @@
               <a:buNone/>
             </a:pPr>
             <a:r>
-              <a:rPr lang="en-US" sz="1400" b="1" dirty="0">
+              <a:rPr lang="en-US" sz="1250" b="1" dirty="0">
                 <a:solidFill>
                   <a:srgbClr val="1B7F3B"/>
                 </a:solidFill>
@@ -17994,20 +19351,20 @@
               </a:rPr>
               <a:t>予約完了！</a:t>
             </a:r>
-            <a:endParaRPr lang="en-US" sz="1400" dirty="0"/>
-          </a:p>
-        </p:txBody>
-      </p:sp>
-      <p:sp>
-        <p:nvSpPr>
-          <p:cNvPr id="44" name="Text 41"/>
-          <p:cNvSpPr txBox="1"/>
-          <p:nvPr/>
-        </p:nvSpPr>
-        <p:spPr>
-          <a:xfrm>
-            <a:off x="6912864" y="3493008"/>
-            <a:ext cx="1664208" cy="731520"/>
+            <a:endParaRPr lang="en-US" sz="1250" dirty="0"/>
+          </a:p>
+        </p:txBody>
+      </p:sp>
+      <p:sp>
+        <p:nvSpPr>
+          <p:cNvPr id="54" name="Text 51"/>
+          <p:cNvSpPr txBox="1"/>
+          <p:nvPr/>
+        </p:nvSpPr>
+        <p:spPr>
+          <a:xfrm>
+            <a:off x="7260336" y="3410712"/>
+            <a:ext cx="1316736" cy="822960"/>
           </a:xfrm>
           <a:prstGeom prst="rect">
             <a:avLst/>
@@ -18023,7 +19380,7 @@
               <a:buNone/>
             </a:pPr>
             <a:r>
-              <a:rPr lang="en-US" sz="1000" dirty="0">
+              <a:rPr lang="en-US" sz="900" dirty="0">
                 <a:solidFill>
                   <a:srgbClr val="1E2A30"/>
                 </a:solidFill>
@@ -18033,19 +19390,19 @@
               </a:rPr>
               <a:t>会議のURLをメールで送ることを伝えて、電話を終えます</a:t>
             </a:r>
-            <a:endParaRPr lang="en-US" sz="1000" dirty="0"/>
-          </a:p>
-        </p:txBody>
-      </p:sp>
-      <p:sp>
-        <p:nvSpPr>
-          <p:cNvPr id="45" name="Text 42"/>
-          <p:cNvSpPr txBox="1"/>
-          <p:nvPr/>
-        </p:nvSpPr>
-        <p:spPr>
-          <a:xfrm>
-            <a:off x="457200" y="4434840"/>
+            <a:endParaRPr lang="en-US" sz="900" dirty="0"/>
+          </a:p>
+        </p:txBody>
+      </p:sp>
+      <p:sp>
+        <p:nvSpPr>
+          <p:cNvPr id="55" name="Text 52"/>
+          <p:cNvSpPr txBox="1"/>
+          <p:nvPr/>
+        </p:nvSpPr>
+        <p:spPr>
+          <a:xfrm>
+            <a:off x="457200" y="4416552"/>
             <a:ext cx="5486400" cy="256032"/>
           </a:xfrm>
           <a:prstGeom prst="rect">
@@ -18246,7 +19603,7 @@
                 <a:ea typeface="Meiryo" pitchFamily="34" charset="-122"/>
                 <a:cs typeface="Meiryo" pitchFamily="34" charset="-120"/>
               </a:rPr>
-              <a:t>8 / 16</a:t>
+              <a:t>8 / 17</a:t>
             </a:r>
             <a:endParaRPr lang="en-US" sz="900" dirty="0"/>
           </a:p>
@@ -19580,7 +20937,7 @@
                 <a:ea typeface="Meiryo" pitchFamily="34" charset="-122"/>
                 <a:cs typeface="Meiryo" pitchFamily="34" charset="-120"/>
               </a:rPr>
-              <a:t>9 / 16</a:t>
+              <a:t>9 / 17</a:t>
             </a:r>
             <a:endParaRPr lang="en-US" sz="900" dirty="0"/>
           </a:p>
